--- a/reports/our-green-house/2026-10/Our_Green_House_Monthly_Website_Maintenance_Report_October_2026.pptx
+++ b/reports/our-green-house/2026-10/Our_Green_House_Monthly_Website_Maintenance_Report_October_2026.pptx
@@ -4,6 +4,9 @@
   <p:sldMasterIdLst>
     <p:sldMasterId id="2147483648" r:id="rId1"/>
   </p:sldMasterIdLst>
+  <p:notesMasterIdLst>
+    <p:notesMasterId r:id="rId15"/>
+  </p:notesMasterIdLst>
   <p:sldIdLst>
     <p:sldId id="256" r:id="rId2"/>
     <p:sldId id="257" r:id="rId3"/>
@@ -19,9 +22,6 @@
     <p:sldId id="267" r:id="rId13"/>
     <p:sldId id="268" r:id="rId14"/>
   </p:sldIdLst>
-  <p:notesMasterIdLst>
-    <p:notesMasterId r:id="rId15"/>
-  </p:notesMasterIdLst>
   <p:sldSz cx="12192000" cy="6858000"/>
   <p:notesSz cx="6858000" cy="12192000"/>
   <p:defaultTextStyle>
@@ -116,13 +116,20 @@
       </a:defRPr>
     </a:lvl9pPr>
   </p:defaultTextStyle>
+  <p:extLst>
+    <p:ext uri="{EFAFB233-063F-42B5-8137-9DF3F51BA10A}">
+      <p15:sldGuideLst xmlns:p15="http://schemas.microsoft.com/office/powerpoint/2012/main"/>
+    </p:ext>
+  </p:extLst>
 </p:presentation>
 </file>
 
 <file path=ppt/charts/chart1.xml><?xml version="1.0" encoding="utf-8"?>
-<c:chartSpace xmlns:c="http://schemas.openxmlformats.org/drawingml/2006/chart" xmlns:a="http://schemas.openxmlformats.org/drawingml/2006/main" xmlns:r="http://schemas.openxmlformats.org/officeDocument/2006/relationships">
+<c:chartSpace xmlns:c="http://schemas.openxmlformats.org/drawingml/2006/chart" xmlns:a="http://schemas.openxmlformats.org/drawingml/2006/main" xmlns:r="http://schemas.openxmlformats.org/officeDocument/2006/relationships" xmlns:c16r2="http://schemas.microsoft.com/office/drawing/2015/06/chart">
   <c:date1904 val="0"/>
+  <c:lang val="en-US"/>
   <c:roundedCorners val="1"/>
+  <c:style val="2"/>
   <c:chart>
     <c:title>
       <c:tx>
@@ -139,7 +146,7 @@
               </a:defRPr>
             </a:pPr>
             <a:r>
-              <a:rPr sz="1200" b="0" i="0" u="none" strike="noStrike">
+              <a:rPr lang="fr-FR" sz="1200" b="0" i="0" u="none" strike="noStrike">
                 <a:solidFill>
                   <a:srgbClr val="475569"/>
                 </a:solidFill>
@@ -150,7 +157,6 @@
           </a:p>
         </c:rich>
       </c:tx>
-      <c:layout/>
       <c:overlay val="0"/>
     </c:title>
     <c:autoTitleDeleted val="0"/>
@@ -183,18 +189,26 @@
           <c:invertIfNegative val="0"/>
           <c:dLbls>
             <c:numFmt formatCode="#,##0" sourceLinked="0"/>
+            <c:spPr>
+              <a:noFill/>
+              <a:ln>
+                <a:noFill/>
+              </a:ln>
+              <a:effectLst/>
+            </c:spPr>
             <c:txPr>
               <a:bodyPr/>
               <a:lstStyle/>
               <a:p>
                 <a:pPr>
-                  <a:defRPr b="0" i="0" strike="noStrike" sz="1100" u="none">
+                  <a:defRPr sz="1100" b="0" i="0" u="none" strike="noStrike">
                     <a:solidFill>
                       <a:srgbClr val="0F172A"/>
                     </a:solidFill>
                     <a:latin typeface="Arial"/>
                   </a:defRPr>
                 </a:pPr>
+                <a:endParaRPr lang="en-US"/>
               </a:p>
             </c:txPr>
             <c:showLegendKey val="0"/>
@@ -204,25 +218,28 @@
             <c:showPercent val="0"/>
             <c:showBubbleSize val="0"/>
             <c:showLeaderLines val="0"/>
+            <c:extLst>
+              <c:ext xmlns:c15="http://schemas.microsoft.com/office/drawing/2012/chart" uri="{CE6537A1-D6FC-4f65-9D91-7224C49458BB}">
+                <c15:showLeaderLines val="0"/>
+              </c:ext>
+            </c:extLst>
           </c:dLbls>
           <c:cat>
-            <c:multiLvlStrRef>
+            <c:strRef>
               <c:f>Sheet1!$A$2:$A$4</c:f>
-              <c:multiLvlStrCache>
+              <c:strCache>
                 <c:ptCount val="3"/>
-                <c:lvl>
-                  <c:pt idx="0">
-                    <c:v>Under 1 second</c:v>
-                  </c:pt>
-                  <c:pt idx="1">
-                    <c:v>1 to 2 seconds</c:v>
-                  </c:pt>
-                  <c:pt idx="2">
-                    <c:v>Over 2 seconds</c:v>
-                  </c:pt>
-                </c:lvl>
-              </c:multiLvlStrCache>
-            </c:multiLvlStrRef>
+                <c:pt idx="0">
+                  <c:v>Under 1 second</c:v>
+                </c:pt>
+                <c:pt idx="1">
+                  <c:v>1 to 2 seconds</c:v>
+                </c:pt>
+                <c:pt idx="2">
+                  <c:v>Over 2 seconds</c:v>
+                </c:pt>
+              </c:strCache>
+            </c:strRef>
           </c:cat>
           <c:val>
             <c:numRef>
@@ -242,36 +259,23 @@
               </c:numCache>
             </c:numRef>
           </c:val>
+          <c:extLst>
+            <c:ext xmlns:c16="http://schemas.microsoft.com/office/drawing/2014/chart" uri="{C3380CC4-5D6E-409C-BE32-E72D297353CC}">
+              <c16:uniqueId val="{00000000-02C5-48FF-BB74-C05BA9647E06}"/>
+            </c:ext>
+          </c:extLst>
         </c:ser>
         <c:dLbls>
-          <c:numFmt formatCode="#,##0" sourceLinked="0"/>
-          <c:txPr>
-            <a:bodyPr/>
-            <a:lstStyle/>
-            <a:p>
-              <a:pPr>
-                <a:defRPr b="0" i="0" strike="noStrike" sz="1100" u="none">
-                  <a:solidFill>
-                    <a:srgbClr val="0F172A"/>
-                  </a:solidFill>
-                  <a:latin typeface="Arial"/>
-                </a:defRPr>
-              </a:pPr>
-            </a:p>
-          </c:txPr>
           <c:showLegendKey val="0"/>
           <c:showVal val="1"/>
           <c:showCatName val="0"/>
           <c:showSerName val="0"/>
           <c:showPercent val="0"/>
           <c:showBubbleSize val="0"/>
-          <c:showLeaderLines val="0"/>
         </c:dLbls>
         <c:gapWidth val="150"/>
-        <c:overlap val="0"/>
         <c:axId val="2094734554"/>
         <c:axId val="2094734552"/>
-        <c:axId val="2094734556"/>
       </c:barChart>
       <c:catAx>
         <c:axId val="2094734554"/>
@@ -312,6 +316,7 @@
         <c:crosses val="autoZero"/>
         <c:auto val="1"/>
         <c:lblAlgn val="ctr"/>
+        <c:lblOffset val="100"/>
         <c:noMultiLvlLbl val="1"/>
       </c:catAx>
       <c:valAx>
@@ -320,35 +325,11 @@
           <c:orientation val="minMax"/>
         </c:scaling>
         <c:delete val="1"/>
-        <c:axPos val="b"/>
+        <c:axPos val="t"/>
         <c:numFmt formatCode="General" sourceLinked="0"/>
         <c:majorTickMark val="out"/>
         <c:minorTickMark val="none"/>
         <c:tickLblPos val="low"/>
-        <c:spPr>
-          <a:ln w="12700" cap="flat">
-            <a:solidFill>
-              <a:srgbClr val="888888"/>
-            </a:solidFill>
-            <a:prstDash val="solid"/>
-            <a:round/>
-          </a:ln>
-        </c:spPr>
-        <c:txPr>
-          <a:bodyPr/>
-          <a:lstStyle/>
-          <a:p>
-            <a:pPr>
-              <a:defRPr sz="1200" b="0" i="0" u="none" strike="noStrike">
-                <a:solidFill>
-                  <a:srgbClr val="000000"/>
-                </a:solidFill>
-                <a:latin typeface="Arial"/>
-              </a:defRPr>
-            </a:pPr>
-            <a:endParaRPr lang="en-US"/>
-          </a:p>
-        </c:txPr>
         <c:crossAx val="2094734554"/>
         <c:crosses val="autoZero"/>
         <c:crossBetween val="between"/>
@@ -363,6 +344,7 @@
     </c:plotArea>
     <c:plotVisOnly val="1"/>
     <c:dispBlanksAs val="span"/>
+    <c:showDLblsOverMax val="1"/>
   </c:chart>
   <c:spPr>
     <a:noFill/>
@@ -378,9 +360,11 @@
 </file>
 
 <file path=ppt/charts/chart2.xml><?xml version="1.0" encoding="utf-8"?>
-<c:chartSpace xmlns:c="http://schemas.openxmlformats.org/drawingml/2006/chart" xmlns:a="http://schemas.openxmlformats.org/drawingml/2006/main" xmlns:r="http://schemas.openxmlformats.org/officeDocument/2006/relationships">
+<c:chartSpace xmlns:c="http://schemas.openxmlformats.org/drawingml/2006/chart" xmlns:a="http://schemas.openxmlformats.org/drawingml/2006/main" xmlns:r="http://schemas.openxmlformats.org/officeDocument/2006/relationships" xmlns:c16r2="http://schemas.microsoft.com/office/drawing/2015/06/chart">
   <c:date1904 val="0"/>
+  <c:lang val="en-US"/>
   <c:roundedCorners val="1"/>
+  <c:style val="2"/>
   <c:chart>
     <c:autoTitleDeleted val="1"/>
     <c:plotArea>
@@ -427,6 +411,11 @@
                 </a:solidFill>
               </a:ln>
             </c:spPr>
+            <c:extLst>
+              <c:ext xmlns:c16="http://schemas.microsoft.com/office/drawing/2014/chart" uri="{C3380CC4-5D6E-409C-BE32-E72D297353CC}">
+                <c16:uniqueId val="{00000001-6BE8-4623-9CC3-F97092E6BD83}"/>
+              </c:ext>
+            </c:extLst>
           </c:dPt>
           <c:dPt>
             <c:idx val="1"/>
@@ -441,6 +430,11 @@
                 </a:solidFill>
               </a:ln>
             </c:spPr>
+            <c:extLst>
+              <c:ext xmlns:c16="http://schemas.microsoft.com/office/drawing/2014/chart" uri="{C3380CC4-5D6E-409C-BE32-E72D297353CC}">
+                <c16:uniqueId val="{00000003-6BE8-4623-9CC3-F97092E6BD83}"/>
+              </c:ext>
+            </c:extLst>
           </c:dPt>
           <c:dPt>
             <c:idx val="2"/>
@@ -455,6 +449,11 @@
                 </a:solidFill>
               </a:ln>
             </c:spPr>
+            <c:extLst>
+              <c:ext xmlns:c16="http://schemas.microsoft.com/office/drawing/2014/chart" uri="{C3380CC4-5D6E-409C-BE32-E72D297353CC}">
+                <c16:uniqueId val="{00000005-6BE8-4623-9CC3-F97092E6BD83}"/>
+              </c:ext>
+            </c:extLst>
           </c:dPt>
           <c:dLbls>
             <c:dLbl>
@@ -473,6 +472,7 @@
                       <a:latin typeface="Arial"/>
                     </a:defRPr>
                   </a:pPr>
+                  <a:endParaRPr lang="en-US"/>
                 </a:p>
               </c:txPr>
               <c:showLegendKey val="0"/>
@@ -481,6 +481,12 @@
               <c:showSerName val="0"/>
               <c:showPercent val="0"/>
               <c:showBubbleSize val="0"/>
+              <c:extLst>
+                <c:ext xmlns:c15="http://schemas.microsoft.com/office/drawing/2012/chart" uri="{CE6537A1-D6FC-4f65-9D91-7224C49458BB}"/>
+                <c:ext xmlns:c16="http://schemas.microsoft.com/office/drawing/2014/chart" uri="{C3380CC4-5D6E-409C-BE32-E72D297353CC}">
+                  <c16:uniqueId val="{00000001-6BE8-4623-9CC3-F97092E6BD83}"/>
+                </c:ext>
+              </c:extLst>
             </c:dLbl>
             <c:dLbl>
               <c:idx val="1"/>
@@ -498,6 +504,7 @@
                       <a:latin typeface="Arial"/>
                     </a:defRPr>
                   </a:pPr>
+                  <a:endParaRPr lang="en-US"/>
                 </a:p>
               </c:txPr>
               <c:showLegendKey val="0"/>
@@ -506,6 +513,12 @@
               <c:showSerName val="0"/>
               <c:showPercent val="0"/>
               <c:showBubbleSize val="0"/>
+              <c:extLst>
+                <c:ext xmlns:c15="http://schemas.microsoft.com/office/drawing/2012/chart" uri="{CE6537A1-D6FC-4f65-9D91-7224C49458BB}"/>
+                <c:ext xmlns:c16="http://schemas.microsoft.com/office/drawing/2014/chart" uri="{C3380CC4-5D6E-409C-BE32-E72D297353CC}">
+                  <c16:uniqueId val="{00000003-6BE8-4623-9CC3-F97092E6BD83}"/>
+                </c:ext>
+              </c:extLst>
             </c:dLbl>
             <c:dLbl>
               <c:idx val="2"/>
@@ -523,6 +536,7 @@
                       <a:latin typeface="Arial"/>
                     </a:defRPr>
                   </a:pPr>
+                  <a:endParaRPr lang="en-US"/>
                 </a:p>
               </c:txPr>
               <c:showLegendKey val="0"/>
@@ -531,8 +545,21 @@
               <c:showSerName val="0"/>
               <c:showPercent val="0"/>
               <c:showBubbleSize val="0"/>
+              <c:extLst>
+                <c:ext xmlns:c15="http://schemas.microsoft.com/office/drawing/2012/chart" uri="{CE6537A1-D6FC-4f65-9D91-7224C49458BB}"/>
+                <c:ext xmlns:c16="http://schemas.microsoft.com/office/drawing/2014/chart" uri="{C3380CC4-5D6E-409C-BE32-E72D297353CC}">
+                  <c16:uniqueId val="{00000005-6BE8-4623-9CC3-F97092E6BD83}"/>
+                </c:ext>
+              </c:extLst>
             </c:dLbl>
             <c:numFmt formatCode="General" sourceLinked="0"/>
+            <c:spPr>
+              <a:noFill/>
+              <a:ln>
+                <a:noFill/>
+              </a:ln>
+              <a:effectLst/>
+            </c:spPr>
             <c:txPr>
               <a:bodyPr/>
               <a:lstStyle/>
@@ -545,6 +572,7 @@
                     <a:latin typeface="Arial"/>
                   </a:defRPr>
                 </a:pPr>
+                <a:endParaRPr lang="en-US"/>
               </a:p>
             </c:txPr>
             <c:showLegendKey val="0"/>
@@ -554,6 +582,9 @@
             <c:showPercent val="1"/>
             <c:showBubbleSize val="0"/>
             <c:showLeaderLines val="0"/>
+            <c:extLst>
+              <c:ext xmlns:c15="http://schemas.microsoft.com/office/drawing/2012/chart" uri="{CE6537A1-D6FC-4f65-9D91-7224C49458BB}"/>
+            </c:extLst>
           </c:dLbls>
           <c:cat>
             <c:strRef>
@@ -590,7 +621,21 @@
               </c:numCache>
             </c:numRef>
           </c:val>
+          <c:extLst>
+            <c:ext xmlns:c16="http://schemas.microsoft.com/office/drawing/2014/chart" uri="{C3380CC4-5D6E-409C-BE32-E72D297353CC}">
+              <c16:uniqueId val="{00000006-6BE8-4623-9CC3-F97092E6BD83}"/>
+            </c:ext>
+          </c:extLst>
         </c:ser>
+        <c:dLbls>
+          <c:showLegendKey val="0"/>
+          <c:showVal val="0"/>
+          <c:showCatName val="0"/>
+          <c:showSerName val="0"/>
+          <c:showPercent val="0"/>
+          <c:showBubbleSize val="0"/>
+          <c:showLeaderLines val="0"/>
+        </c:dLbls>
         <c:firstSliceAng val="0"/>
         <c:holeSize val="60"/>
       </c:doughnutChart>
@@ -622,6 +667,7 @@
     </c:legend>
     <c:plotVisOnly val="1"/>
     <c:dispBlanksAs val="span"/>
+    <c:showDLblsOverMax val="1"/>
   </c:chart>
   <c:spPr>
     <a:noFill/>
@@ -658,234 +704,10 @@
           <a:chExt cx="0" cy="0"/>
         </a:xfrm>
       </p:grpSpPr>
-      <p:sp>
-        <p:nvSpPr>
-          <p:cNvPr id="2" name="Header Placeholder 1"/>
-          <p:cNvSpPr>
-            <a:spLocks noGrp="1"/>
-          </p:cNvSpPr>
-          <p:nvPr>
-            <p:ph type="hdr" sz="quarter"/>
-          </p:nvPr>
-        </p:nvSpPr>
-        <p:spPr>
-          <a:xfrm>
-            <a:off x="0" y="0"/>
-            <a:ext cx="2971800" cy="458788"/>
-          </a:xfrm>
-          <a:prstGeom prst="rect">
-            <a:avLst/>
-          </a:prstGeom>
-        </p:spPr>
-        <p:txBody>
-          <a:bodyPr vert="horz" lIns="91440" tIns="45720" rIns="91440" bIns="45720" rtlCol="0"/>
-          <a:lstStyle>
-            <a:lvl1pPr algn="l">
-              <a:defRPr sz="1200"/>
-            </a:lvl1pPr>
-          </a:lstStyle>
-          <a:p>
-            <a:endParaRPr lang="en-US"/>
-          </a:p>
-        </p:txBody>
-      </p:sp>
-      <p:sp>
-        <p:nvSpPr>
-          <p:cNvPr id="3" name="Date Placeholder 2"/>
-          <p:cNvSpPr>
-            <a:spLocks noGrp="1"/>
-          </p:cNvSpPr>
-          <p:nvPr>
-            <p:ph type="dt" idx="1"/>
-          </p:nvPr>
-        </p:nvSpPr>
-        <p:spPr>
-          <a:xfrm>
-            <a:off x="3884613" y="0"/>
-            <a:ext cx="2971800" cy="458788"/>
-          </a:xfrm>
-          <a:prstGeom prst="rect">
-            <a:avLst/>
-          </a:prstGeom>
-        </p:spPr>
-        <p:txBody>
-          <a:bodyPr vert="horz" lIns="91440" tIns="45720" rIns="91440" bIns="45720" rtlCol="0"/>
-          <a:lstStyle>
-            <a:lvl1pPr algn="r">
-              <a:defRPr sz="1200"/>
-            </a:lvl1pPr>
-          </a:lstStyle>
-          <a:p>
-            <a:fld id="{5282F153-3F37-0F45-9E97-73ACFA13230C}" type="datetimeFigureOut">
-              <a:rPr lang="en-US"/>
-              <a:t>7/23/19</a:t>
-            </a:fld>
-            <a:endParaRPr lang="en-US"/>
-          </a:p>
-        </p:txBody>
-      </p:sp>
-      <p:sp>
-        <p:nvSpPr>
-          <p:cNvPr id="4" name="Slide Image Placeholder 3"/>
-          <p:cNvSpPr>
-            <a:spLocks noGrp="1" noRot="1" noChangeAspect="1"/>
-          </p:cNvSpPr>
-          <p:nvPr>
-            <p:ph type="sldImg" idx="2"/>
-          </p:nvPr>
-        </p:nvSpPr>
-        <p:spPr>
-          <a:xfrm>
-            <a:off x="685800" y="1143000"/>
-            <a:ext cx="5486400" cy="3086100"/>
-          </a:xfrm>
-          <a:prstGeom prst="rect">
-            <a:avLst/>
-          </a:prstGeom>
-          <a:noFill/>
-          <a:ln w="12700">
-            <a:solidFill>
-              <a:prstClr val="black"/>
-            </a:solidFill>
-          </a:ln>
-        </p:spPr>
-        <p:txBody>
-          <a:bodyPr vert="horz" lIns="91440" tIns="45720" rIns="91440" bIns="45720" rtlCol="0" anchor="ctr"/>
-          <a:lstStyle/>
-          <a:p>
-            <a:endParaRPr lang="en-US"/>
-          </a:p>
-        </p:txBody>
-      </p:sp>
-      <p:sp>
-        <p:nvSpPr>
-          <p:cNvPr id="5" name="Notes Placeholder 4"/>
-          <p:cNvSpPr>
-            <a:spLocks noGrp="1"/>
-          </p:cNvSpPr>
-          <p:nvPr>
-            <p:ph type="body" sz="quarter" idx="3"/>
-          </p:nvPr>
-        </p:nvSpPr>
-        <p:spPr>
-          <a:xfrm>
-            <a:off x="685800" y="4400550"/>
-            <a:ext cx="5486400" cy="3600450"/>
-          </a:xfrm>
-          <a:prstGeom prst="rect">
-            <a:avLst/>
-          </a:prstGeom>
-        </p:spPr>
-        <p:txBody>
-          <a:bodyPr vert="horz" lIns="91440" tIns="45720" rIns="91440" bIns="45720" rtlCol="0"/>
-          <a:lstStyle/>
-          <a:p>
-            <a:pPr lvl="0"/>
-            <a:r>
-              <a:rPr lang="en-US"/>
-              <a:t>Click to edit Master text styles</a:t>
-            </a:r>
-          </a:p>
-          <a:p>
-            <a:pPr lvl="1"/>
-            <a:r>
-              <a:rPr lang="en-US"/>
-              <a:t>Second level</a:t>
-            </a:r>
-          </a:p>
-          <a:p>
-            <a:pPr lvl="2"/>
-            <a:r>
-              <a:rPr lang="en-US"/>
-              <a:t>Third level</a:t>
-            </a:r>
-          </a:p>
-          <a:p>
-            <a:pPr lvl="3"/>
-            <a:r>
-              <a:rPr lang="en-US"/>
-              <a:t>Fourth level</a:t>
-            </a:r>
-          </a:p>
-          <a:p>
-            <a:pPr lvl="4"/>
-            <a:r>
-              <a:rPr lang="en-US"/>
-              <a:t>Fifth level</a:t>
-            </a:r>
-          </a:p>
-        </p:txBody>
-      </p:sp>
-      <p:sp>
-        <p:nvSpPr>
-          <p:cNvPr id="6" name="Footer Placeholder 5"/>
-          <p:cNvSpPr>
-            <a:spLocks noGrp="1"/>
-          </p:cNvSpPr>
-          <p:nvPr>
-            <p:ph type="ftr" sz="quarter" idx="4"/>
-          </p:nvPr>
-        </p:nvSpPr>
-        <p:spPr>
-          <a:xfrm>
-            <a:off x="0" y="8685213"/>
-            <a:ext cx="2971800" cy="458787"/>
-          </a:xfrm>
-          <a:prstGeom prst="rect">
-            <a:avLst/>
-          </a:prstGeom>
-        </p:spPr>
-        <p:txBody>
-          <a:bodyPr vert="horz" lIns="91440" tIns="45720" rIns="91440" bIns="45720" rtlCol="0" anchor="b"/>
-          <a:lstStyle>
-            <a:lvl1pPr algn="l">
-              <a:defRPr sz="1200"/>
-            </a:lvl1pPr>
-          </a:lstStyle>
-          <a:p>
-            <a:endParaRPr lang="en-US"/>
-          </a:p>
-        </p:txBody>
-      </p:sp>
-      <p:sp>
-        <p:nvSpPr>
-          <p:cNvPr id="7" name="Slide Number Placeholder 6"/>
-          <p:cNvSpPr>
-            <a:spLocks noGrp="1"/>
-          </p:cNvSpPr>
-          <p:nvPr>
-            <p:ph type="sldNum" sz="quarter" idx="5"/>
-          </p:nvPr>
-        </p:nvSpPr>
-        <p:spPr>
-          <a:xfrm>
-            <a:off x="3884613" y="8685213"/>
-            <a:ext cx="2971800" cy="458787"/>
-          </a:xfrm>
-          <a:prstGeom prst="rect">
-            <a:avLst/>
-          </a:prstGeom>
-        </p:spPr>
-        <p:txBody>
-          <a:bodyPr vert="horz" lIns="91440" tIns="45720" rIns="91440" bIns="45720" rtlCol="0" anchor="b"/>
-          <a:lstStyle>
-            <a:lvl1pPr algn="r">
-              <a:defRPr sz="1200"/>
-            </a:lvl1pPr>
-          </a:lstStyle>
-          <a:p>
-            <a:fld id="{CE5E9CC1-C706-0F49-92D6-E571CC5EEA8F}" type="slidenum">
-              <a:rPr lang="en-US"/>
-              <a:t>‹#›</a:t>
-            </a:fld>
-            <a:endParaRPr lang="en-US"/>
-          </a:p>
-        </p:txBody>
-      </p:sp>
     </p:spTree>
     <p:extLst>
       <p:ext uri="{BB962C8B-B14F-4D97-AF65-F5344CB8AC3E}">
-        <p14:creationId xmlns:p14="http://schemas.microsoft.com/office/powerpoint/2010/main" val="1024086991"/>
+        <p14:creationId xmlns:p14="http://schemas.microsoft.com/office/powerpoint/2010/main" val="1062979460"/>
       </p:ext>
     </p:extLst>
   </p:cSld>
@@ -1029,10 +851,6 @@
           <a:bodyPr/>
           <a:lstStyle/>
           <a:p>
-            <a:r>
-              <a:rPr lang="en-US" dirty="0"/>
-              <a:t/>
-            </a:r>
             <a:endParaRPr lang="en-US" dirty="0"/>
           </a:p>
         </p:txBody>
@@ -1117,10 +935,6 @@
           <a:bodyPr/>
           <a:lstStyle/>
           <a:p>
-            <a:r>
-              <a:rPr lang="en-US" dirty="0"/>
-              <a:t/>
-            </a:r>
             <a:endParaRPr lang="en-US" dirty="0"/>
           </a:p>
         </p:txBody>
@@ -1205,10 +1019,6 @@
           <a:bodyPr/>
           <a:lstStyle/>
           <a:p>
-            <a:r>
-              <a:rPr lang="en-US" dirty="0"/>
-              <a:t/>
-            </a:r>
             <a:endParaRPr lang="en-US" dirty="0"/>
           </a:p>
         </p:txBody>
@@ -1293,10 +1103,6 @@
           <a:bodyPr/>
           <a:lstStyle/>
           <a:p>
-            <a:r>
-              <a:rPr lang="en-US" dirty="0"/>
-              <a:t/>
-            </a:r>
             <a:endParaRPr lang="en-US" dirty="0"/>
           </a:p>
         </p:txBody>
@@ -1381,10 +1187,6 @@
           <a:bodyPr/>
           <a:lstStyle/>
           <a:p>
-            <a:r>
-              <a:rPr lang="en-US" dirty="0"/>
-              <a:t/>
-            </a:r>
             <a:endParaRPr lang="en-US" dirty="0"/>
           </a:p>
         </p:txBody>
@@ -1469,10 +1271,6 @@
           <a:bodyPr/>
           <a:lstStyle/>
           <a:p>
-            <a:r>
-              <a:rPr lang="en-US" dirty="0"/>
-              <a:t/>
-            </a:r>
             <a:endParaRPr lang="en-US" dirty="0"/>
           </a:p>
         </p:txBody>
@@ -1557,10 +1355,6 @@
           <a:bodyPr/>
           <a:lstStyle/>
           <a:p>
-            <a:r>
-              <a:rPr lang="en-US" dirty="0"/>
-              <a:t/>
-            </a:r>
             <a:endParaRPr lang="en-US" dirty="0"/>
           </a:p>
         </p:txBody>
@@ -1645,10 +1439,6 @@
           <a:bodyPr/>
           <a:lstStyle/>
           <a:p>
-            <a:r>
-              <a:rPr lang="en-US" dirty="0"/>
-              <a:t/>
-            </a:r>
             <a:endParaRPr lang="en-US" dirty="0"/>
           </a:p>
         </p:txBody>
@@ -1733,10 +1523,6 @@
           <a:bodyPr/>
           <a:lstStyle/>
           <a:p>
-            <a:r>
-              <a:rPr lang="en-US" dirty="0"/>
-              <a:t/>
-            </a:r>
             <a:endParaRPr lang="en-US" dirty="0"/>
           </a:p>
         </p:txBody>
@@ -1821,10 +1607,6 @@
           <a:bodyPr/>
           <a:lstStyle/>
           <a:p>
-            <a:r>
-              <a:rPr lang="en-US" dirty="0"/>
-              <a:t/>
-            </a:r>
             <a:endParaRPr lang="en-US" dirty="0"/>
           </a:p>
         </p:txBody>
@@ -1909,10 +1691,6 @@
           <a:bodyPr/>
           <a:lstStyle/>
           <a:p>
-            <a:r>
-              <a:rPr lang="en-US" dirty="0"/>
-              <a:t/>
-            </a:r>
             <a:endParaRPr lang="en-US" dirty="0"/>
           </a:p>
         </p:txBody>
@@ -1997,10 +1775,6 @@
           <a:bodyPr/>
           <a:lstStyle/>
           <a:p>
-            <a:r>
-              <a:rPr lang="en-US" dirty="0"/>
-              <a:t/>
-            </a:r>
             <a:endParaRPr lang="en-US" dirty="0"/>
           </a:p>
         </p:txBody>
@@ -2085,10 +1859,6 @@
           <a:bodyPr/>
           <a:lstStyle/>
           <a:p>
-            <a:r>
-              <a:rPr lang="en-US" dirty="0"/>
-              <a:t/>
-            </a:r>
             <a:endParaRPr lang="en-US" dirty="0"/>
           </a:p>
         </p:txBody>
@@ -2162,6 +1932,11 @@
 <file path=ppt/slideMasters/slideMaster1.xml><?xml version="1.0" encoding="utf-8"?>
 <p:sldMaster xmlns:a="http://schemas.openxmlformats.org/drawingml/2006/main" xmlns:r="http://schemas.openxmlformats.org/officeDocument/2006/relationships" xmlns:p="http://schemas.openxmlformats.org/presentationml/2006/main">
   <p:cSld>
+    <p:bg>
+      <p:bgRef idx="1001">
+        <a:schemeClr val="bg1"/>
+      </p:bgRef>
+    </p:bg>
     <p:spTree>
       <p:nvGrpSpPr>
         <p:cNvPr id="1" name=""/>
@@ -2444,6 +2219,7 @@
         <a:solidFill>
           <a:srgbClr val="0B1929"/>
         </a:solidFill>
+        <a:effectLst/>
       </p:bgPr>
     </p:bg>
     <p:spTree>
@@ -2520,14 +2296,14 @@
       </p:sp>
       <p:pic>
         <p:nvPicPr>
-          <p:cNvPr id="4" name="Image 0" descr="C:/Projects/OGH/build/brand/logo_white.png">    </p:cNvPr>
+          <p:cNvPr id="4" name="Image 0" descr="C:/Projects/OGH/build/brand/logo_white.png"/>
           <p:cNvPicPr>
             <a:picLocks noChangeAspect="1"/>
           </p:cNvPicPr>
           <p:nvPr/>
         </p:nvPicPr>
         <p:blipFill>
-          <a:blip r:embed="rId1"/>
+          <a:blip r:embed="rId3"/>
           <a:stretch>
             <a:fillRect/>
           </a:stretch>
@@ -2563,11 +2339,11 @@
           <a:bodyPr wrap="square" lIns="0" tIns="0" rIns="0" bIns="0" rtlCol="0" anchor="ctr"/>
           <a:lstStyle/>
           <a:p>
-            <a:pPr indent="0" marL="0">
-              <a:buNone/>
-            </a:pPr>
-            <a:r>
-              <a:rPr lang="en-US" sz="1400" b="1" spc="400" kern="0" dirty="0">
+            <a:pPr marL="0" indent="0">
+              <a:buNone/>
+            </a:pPr>
+            <a:r>
+              <a:rPr lang="en-US" sz="1400" b="1" kern="0" spc="400" dirty="0">
                 <a:solidFill>
                   <a:srgbClr val="7CC4EC"/>
                 </a:solidFill>
@@ -2602,7 +2378,7 @@
           <a:bodyPr wrap="square" lIns="0" tIns="0" rIns="0" bIns="0" rtlCol="0" anchor="t"/>
           <a:lstStyle/>
           <a:p>
-            <a:pPr indent="0" marL="0">
+            <a:pPr marL="0" indent="0">
               <a:buNone/>
             </a:pPr>
             <a:r>
@@ -2641,7 +2417,7 @@
           <a:bodyPr wrap="square" lIns="0" tIns="0" rIns="0" bIns="0" rtlCol="0" anchor="ctr"/>
           <a:lstStyle/>
           <a:p>
-            <a:pPr indent="0" marL="0">
+            <a:pPr marL="0" indent="0">
               <a:buNone/>
             </a:pPr>
             <a:r>
@@ -2680,7 +2456,7 @@
           <a:bodyPr wrap="square" lIns="0" tIns="0" rIns="0" bIns="0" rtlCol="0" anchor="ctr"/>
           <a:lstStyle/>
           <a:p>
-            <a:pPr indent="0" marL="0">
+            <a:pPr marL="0" indent="0">
               <a:buNone/>
             </a:pPr>
             <a:r>
@@ -2719,7 +2495,7 @@
           <a:bodyPr wrap="square" lIns="0" tIns="0" rIns="0" bIns="0" rtlCol="0" anchor="ctr"/>
           <a:lstStyle/>
           <a:p>
-            <a:pPr indent="0" marL="0">
+            <a:pPr marL="0" indent="0">
               <a:buNone/>
             </a:pPr>
             <a:r>
@@ -2753,6 +2529,7 @@
         <a:solidFill>
           <a:srgbClr val="FFFFFF"/>
         </a:solidFill>
+        <a:effectLst/>
       </p:bgPr>
     </p:bg>
     <p:spTree>
@@ -2790,11 +2567,11 @@
           <a:bodyPr wrap="square" lIns="0" tIns="0" rIns="0" bIns="0" rtlCol="0" anchor="ctr"/>
           <a:lstStyle/>
           <a:p>
-            <a:pPr indent="0" marL="0">
-              <a:buNone/>
-            </a:pPr>
-            <a:r>
-              <a:rPr lang="en-US" sz="1200" b="1" spc="300" kern="0" dirty="0">
+            <a:pPr marL="0" indent="0">
+              <a:buNone/>
+            </a:pPr>
+            <a:r>
+              <a:rPr lang="en-US" sz="1200" b="1" kern="0" spc="300" dirty="0">
                 <a:solidFill>
                   <a:srgbClr val="0086C7"/>
                 </a:solidFill>
@@ -2810,14 +2587,14 @@
       </p:sp>
       <p:pic>
         <p:nvPicPr>
-          <p:cNvPr id="3" name="Image 0" descr="C:/Projects/OGH/build/brand/logo_color_big.png">    </p:cNvPr>
+          <p:cNvPr id="3" name="Image 0" descr="C:/Projects/OGH/build/brand/logo_color_big.png"/>
           <p:cNvPicPr>
             <a:picLocks noChangeAspect="1"/>
           </p:cNvPicPr>
           <p:nvPr/>
         </p:nvPicPr>
         <p:blipFill>
-          <a:blip r:embed="rId1"/>
+          <a:blip r:embed="rId3"/>
           <a:stretch>
             <a:fillRect/>
           </a:stretch>
@@ -2853,7 +2630,7 @@
           <a:bodyPr wrap="square" lIns="0" tIns="0" rIns="0" bIns="0" rtlCol="0" anchor="t"/>
           <a:lstStyle/>
           <a:p>
-            <a:pPr indent="0" marL="0">
+            <a:pPr marL="0" indent="0">
               <a:buNone/>
             </a:pPr>
             <a:r>
@@ -2892,7 +2669,7 @@
           <a:bodyPr wrap="square" lIns="0" tIns="0" rIns="0" bIns="0" rtlCol="0" anchor="ctr"/>
           <a:lstStyle/>
           <a:p>
-            <a:pPr indent="0" marL="0">
+            <a:pPr marL="0" indent="0">
               <a:buNone/>
             </a:pPr>
             <a:r>
@@ -2931,7 +2708,7 @@
           <a:bodyPr wrap="square" lIns="0" tIns="0" rIns="0" bIns="0" rtlCol="0" anchor="ctr"/>
           <a:lstStyle/>
           <a:p>
-            <a:pPr algn="r" indent="0" marL="0">
+            <a:pPr marL="0" indent="0" algn="r">
               <a:buNone/>
             </a:pPr>
             <a:r>
@@ -2951,7 +2728,7 @@
       </p:sp>
       <p:graphicFrame>
         <p:nvGraphicFramePr>
-          <p:cNvPr id="7" name="Chart 0" descr=""/>
+          <p:cNvPr id="7" name="Chart 0"/>
           <p:cNvGraphicFramePr/>
           <p:nvPr/>
         </p:nvGraphicFramePr>
@@ -2959,9 +2736,9 @@
           <a:off x="457200" y="1554480"/>
           <a:ext cx="3108960" cy="2743200"/>
         </p:xfrm>
-        <a:graphic xmlns:a="http://schemas.openxmlformats.org/drawingml/2006/main">
+        <a:graphic>
           <a:graphicData uri="http://schemas.openxmlformats.org/drawingml/2006/chart">
-            <c:chart xmlns:c="http://schemas.openxmlformats.org/drawingml/2006/chart" r:id="rId2"/>
+            <c:chart xmlns:c="http://schemas.openxmlformats.org/drawingml/2006/chart" xmlns:r="http://schemas.openxmlformats.org/officeDocument/2006/relationships" r:id="rId4"/>
           </a:graphicData>
         </a:graphic>
       </p:graphicFrame>
@@ -2986,7 +2763,7 @@
           <a:bodyPr wrap="square" lIns="0" tIns="0" rIns="0" bIns="0" rtlCol="0" anchor="ctr"/>
           <a:lstStyle/>
           <a:p>
-            <a:pPr algn="ctr" indent="0" marL="0">
+            <a:pPr marL="0" indent="0" algn="ctr">
               <a:buNone/>
             </a:pPr>
             <a:r>
@@ -3025,7 +2802,7 @@
           <a:bodyPr wrap="square" lIns="0" tIns="0" rIns="0" bIns="0" rtlCol="0" anchor="t"/>
           <a:lstStyle/>
           <a:p>
-            <a:pPr algn="ctr" indent="0" marL="0">
+            <a:pPr marL="0" indent="0" algn="ctr">
               <a:buNone/>
             </a:pPr>
             <a:r>
@@ -3064,7 +2841,7 @@
           <a:bodyPr wrap="square" lIns="0" tIns="0" rIns="0" bIns="0" rtlCol="0" anchor="ctr"/>
           <a:lstStyle/>
           <a:p>
-            <a:pPr indent="0" marL="0">
+            <a:pPr marL="0" indent="0">
               <a:buNone/>
             </a:pPr>
             <a:r>
@@ -3103,7 +2880,7 @@
           <a:bodyPr wrap="square" lIns="0" tIns="0" rIns="0" bIns="0" rtlCol="0" anchor="ctr"/>
           <a:lstStyle/>
           <a:p>
-            <a:pPr indent="0" marL="0">
+            <a:pPr marL="0" indent="0">
               <a:buNone/>
             </a:pPr>
             <a:r>
@@ -3142,7 +2919,7 @@
           <a:bodyPr wrap="square" lIns="0" tIns="0" rIns="0" bIns="0" rtlCol="0" anchor="ctr"/>
           <a:lstStyle/>
           <a:p>
-            <a:pPr indent="0" marL="0">
+            <a:pPr marL="0" indent="0">
               <a:buNone/>
             </a:pPr>
             <a:r>
@@ -3181,7 +2958,7 @@
           <a:bodyPr wrap="square" lIns="0" tIns="0" rIns="0" bIns="0" rtlCol="0" anchor="ctr"/>
           <a:lstStyle/>
           <a:p>
-            <a:pPr indent="0" marL="0">
+            <a:pPr marL="0" indent="0">
               <a:buNone/>
             </a:pPr>
             <a:r>
@@ -3247,7 +3024,7 @@
           <a:bodyPr wrap="square" lIns="0" tIns="0" rIns="0" bIns="0" rtlCol="0" anchor="ctr"/>
           <a:lstStyle/>
           <a:p>
-            <a:pPr indent="0" marL="0">
+            <a:pPr marL="0" indent="0">
               <a:buNone/>
             </a:pPr>
             <a:r>
@@ -3286,7 +3063,7 @@
           <a:bodyPr wrap="square" lIns="0" tIns="0" rIns="0" bIns="0" rtlCol="0" anchor="ctr"/>
           <a:lstStyle/>
           <a:p>
-            <a:pPr indent="0" marL="0">
+            <a:pPr marL="0" indent="0">
               <a:buNone/>
             </a:pPr>
             <a:r>
@@ -3325,7 +3102,7 @@
           <a:bodyPr wrap="square" lIns="0" tIns="0" rIns="0" bIns="0" rtlCol="0" anchor="ctr"/>
           <a:lstStyle/>
           <a:p>
-            <a:pPr indent="0" marL="0">
+            <a:pPr marL="0" indent="0">
               <a:buNone/>
             </a:pPr>
             <a:r>
@@ -3364,7 +3141,7 @@
           <a:bodyPr wrap="square" lIns="0" tIns="0" rIns="0" bIns="0" rtlCol="0" anchor="ctr"/>
           <a:lstStyle/>
           <a:p>
-            <a:pPr indent="0" marL="0">
+            <a:pPr marL="0" indent="0">
               <a:buNone/>
             </a:pPr>
             <a:r>
@@ -3411,162 +3188,6 @@
       </p:sp>
       <p:sp>
         <p:nvSpPr>
-          <p:cNvPr id="20" name="Text 16"/>
-          <p:cNvSpPr txBox="1"/>
-          <p:nvPr/>
-        </p:nvSpPr>
-        <p:spPr>
-          <a:xfrm>
-            <a:off x="3977640" y="2761488"/>
-            <a:ext cx="1645920" cy="676656"/>
-          </a:xfrm>
-          <a:prstGeom prst="rect">
-            <a:avLst/>
-          </a:prstGeom>
-          <a:noFill/>
-          <a:ln/>
-        </p:spPr>
-        <p:txBody>
-          <a:bodyPr wrap="square" lIns="0" tIns="0" rIns="0" bIns="0" rtlCol="0" anchor="ctr"/>
-          <a:lstStyle/>
-          <a:p>
-            <a:pPr indent="0" marL="0">
-              <a:buNone/>
-            </a:pPr>
-            <a:r>
-              <a:rPr lang="en-US" sz="1300" b="1" dirty="0">
-                <a:solidFill>
-                  <a:srgbClr val="0B1929"/>
-                </a:solidFill>
-                <a:latin typeface="Calibri" pitchFamily="34" charset="0"/>
-                <a:ea typeface="Calibri" pitchFamily="34" charset="-122"/>
-                <a:cs typeface="Calibri" pitchFamily="34" charset="-120"/>
-              </a:rPr>
-              <a:t>Page speed</a:t>
-            </a:r>
-            <a:endParaRPr lang="en-US" sz="1300" dirty="0"/>
-          </a:p>
-        </p:txBody>
-      </p:sp>
-      <p:sp>
-        <p:nvSpPr>
-          <p:cNvPr id="21" name="Text 17"/>
-          <p:cNvSpPr txBox="1"/>
-          <p:nvPr/>
-        </p:nvSpPr>
-        <p:spPr>
-          <a:xfrm>
-            <a:off x="5669280" y="2761488"/>
-            <a:ext cx="2377440" cy="676656"/>
-          </a:xfrm>
-          <a:prstGeom prst="rect">
-            <a:avLst/>
-          </a:prstGeom>
-          <a:noFill/>
-          <a:ln/>
-        </p:spPr>
-        <p:txBody>
-          <a:bodyPr wrap="square" lIns="0" tIns="0" rIns="0" bIns="0" rtlCol="0" anchor="ctr"/>
-          <a:lstStyle/>
-          <a:p>
-            <a:pPr indent="0" marL="0">
-              <a:buNone/>
-            </a:pPr>
-            <a:r>
-              <a:rPr lang="en-US" sz="1150" dirty="0">
-                <a:solidFill>
-                  <a:srgbClr val="0F172A"/>
-                </a:solidFill>
-                <a:latin typeface="Calibri" pitchFamily="34" charset="0"/>
-                <a:ea typeface="Calibri" pitchFamily="34" charset="-122"/>
-                <a:cs typeface="Calibri" pitchFamily="34" charset="-120"/>
-              </a:rPr>
-              <a:t>A few pages were slower to respond in testing</a:t>
-            </a:r>
-            <a:endParaRPr lang="en-US" sz="1150" dirty="0"/>
-          </a:p>
-        </p:txBody>
-      </p:sp>
-      <p:sp>
-        <p:nvSpPr>
-          <p:cNvPr id="22" name="Text 18"/>
-          <p:cNvSpPr txBox="1"/>
-          <p:nvPr/>
-        </p:nvSpPr>
-        <p:spPr>
-          <a:xfrm>
-            <a:off x="8183880" y="2761488"/>
-            <a:ext cx="1371600" cy="676656"/>
-          </a:xfrm>
-          <a:prstGeom prst="rect">
-            <a:avLst/>
-          </a:prstGeom>
-          <a:noFill/>
-          <a:ln/>
-        </p:spPr>
-        <p:txBody>
-          <a:bodyPr wrap="square" lIns="0" tIns="0" rIns="0" bIns="0" rtlCol="0" anchor="ctr"/>
-          <a:lstStyle/>
-          <a:p>
-            <a:pPr indent="0" marL="0">
-              <a:buNone/>
-            </a:pPr>
-            <a:r>
-              <a:rPr lang="en-US" sz="1150" dirty="0">
-                <a:solidFill>
-                  <a:srgbClr val="0F172A"/>
-                </a:solidFill>
-                <a:latin typeface="Calibri" pitchFamily="34" charset="0"/>
-                <a:ea typeface="Calibri" pitchFamily="34" charset="-122"/>
-                <a:cs typeface="Calibri" pitchFamily="34" charset="-120"/>
-              </a:rPr>
-              <a:t>Monitor</a:t>
-            </a:r>
-            <a:endParaRPr lang="en-US" sz="1150" dirty="0"/>
-          </a:p>
-        </p:txBody>
-      </p:sp>
-      <p:sp>
-        <p:nvSpPr>
-          <p:cNvPr id="23" name="Text 19"/>
-          <p:cNvSpPr txBox="1"/>
-          <p:nvPr/>
-        </p:nvSpPr>
-        <p:spPr>
-          <a:xfrm>
-            <a:off x="9646920" y="2761488"/>
-            <a:ext cx="1874520" cy="676656"/>
-          </a:xfrm>
-          <a:prstGeom prst="rect">
-            <a:avLst/>
-          </a:prstGeom>
-          <a:noFill/>
-          <a:ln/>
-        </p:spPr>
-        <p:txBody>
-          <a:bodyPr wrap="square" lIns="0" tIns="0" rIns="0" bIns="0" rtlCol="0" anchor="ctr"/>
-          <a:lstStyle/>
-          <a:p>
-            <a:pPr indent="0" marL="0">
-              <a:buNone/>
-            </a:pPr>
-            <a:r>
-              <a:rPr lang="en-US" sz="1150" dirty="0">
-                <a:solidFill>
-                  <a:srgbClr val="0F172A"/>
-                </a:solidFill>
-                <a:latin typeface="Calibri" pitchFamily="34" charset="0"/>
-                <a:ea typeface="Calibri" pitchFamily="34" charset="-122"/>
-                <a:cs typeface="Calibri" pitchFamily="34" charset="-120"/>
-              </a:rPr>
-              <a:t>Faster experience, better search ranking</a:t>
-            </a:r>
-            <a:endParaRPr lang="en-US" sz="1150" dirty="0"/>
-          </a:p>
-        </p:txBody>
-      </p:sp>
-      <p:sp>
-        <p:nvSpPr>
           <p:cNvPr id="24" name="Shape 20"/>
           <p:cNvSpPr/>
           <p:nvPr/>
@@ -3613,7 +3234,7 @@
           <a:bodyPr wrap="square" lIns="0" tIns="0" rIns="0" bIns="0" rtlCol="0" anchor="ctr"/>
           <a:lstStyle/>
           <a:p>
-            <a:pPr indent="0" marL="0">
+            <a:pPr marL="0" indent="0">
               <a:buNone/>
             </a:pPr>
             <a:r>
@@ -3652,7 +3273,7 @@
           <a:bodyPr wrap="square" lIns="0" tIns="0" rIns="0" bIns="0" rtlCol="0" anchor="ctr"/>
           <a:lstStyle/>
           <a:p>
-            <a:pPr indent="0" marL="0">
+            <a:pPr marL="0" indent="0">
               <a:buNone/>
             </a:pPr>
             <a:r>
@@ -3691,7 +3312,7 @@
           <a:bodyPr wrap="square" lIns="0" tIns="0" rIns="0" bIns="0" rtlCol="0" anchor="ctr"/>
           <a:lstStyle/>
           <a:p>
-            <a:pPr indent="0" marL="0">
+            <a:pPr marL="0" indent="0">
               <a:buNone/>
             </a:pPr>
             <a:r>
@@ -3730,7 +3351,7 @@
           <a:bodyPr wrap="square" lIns="0" tIns="0" rIns="0" bIns="0" rtlCol="0" anchor="ctr"/>
           <a:lstStyle/>
           <a:p>
-            <a:pPr indent="0" marL="0">
+            <a:pPr marL="0" indent="0">
               <a:buNone/>
             </a:pPr>
             <a:r>
@@ -3796,7 +3417,7 @@
           <a:bodyPr wrap="square" lIns="0" tIns="0" rIns="0" bIns="0" rtlCol="0" anchor="ctr"/>
           <a:lstStyle/>
           <a:p>
-            <a:pPr indent="0" marL="0">
+            <a:pPr marL="0" indent="0">
               <a:buNone/>
             </a:pPr>
             <a:r>
@@ -3835,7 +3456,7 @@
           <a:bodyPr wrap="square" lIns="0" tIns="0" rIns="0" bIns="0" rtlCol="0" anchor="ctr"/>
           <a:lstStyle/>
           <a:p>
-            <a:pPr indent="0" marL="0">
+            <a:pPr marL="0" indent="0">
               <a:buNone/>
             </a:pPr>
             <a:r>
@@ -3874,7 +3495,7 @@
           <a:bodyPr wrap="square" lIns="0" tIns="0" rIns="0" bIns="0" rtlCol="0" anchor="ctr"/>
           <a:lstStyle/>
           <a:p>
-            <a:pPr indent="0" marL="0">
+            <a:pPr marL="0" indent="0">
               <a:buNone/>
             </a:pPr>
             <a:r>
@@ -3913,7 +3534,7 @@
           <a:bodyPr wrap="square" lIns="0" tIns="0" rIns="0" bIns="0" rtlCol="0" anchor="ctr"/>
           <a:lstStyle/>
           <a:p>
-            <a:pPr indent="0" marL="0">
+            <a:pPr marL="0" indent="0">
               <a:buNone/>
             </a:pPr>
             <a:r>
@@ -3926,189 +3547,6 @@
                 <a:cs typeface="Calibri" pitchFamily="34" charset="-120"/>
               </a:rPr>
               <a:t>Easier for all visitors to use</a:t>
-            </a:r>
-            <a:endParaRPr lang="en-US" sz="1150" dirty="0"/>
-          </a:p>
-        </p:txBody>
-      </p:sp>
-      <p:sp>
-        <p:nvSpPr>
-          <p:cNvPr id="34" name="Shape 30"/>
-          <p:cNvSpPr/>
-          <p:nvPr/>
-        </p:nvSpPr>
-        <p:spPr>
-          <a:xfrm>
-            <a:off x="3840480" y="5239512"/>
-            <a:ext cx="7772400" cy="768096"/>
-          </a:xfrm>
-          <a:prstGeom prst="roundRect">
-            <a:avLst>
-              <a:gd name="adj" fmla="val 14286"/>
-            </a:avLst>
-          </a:prstGeom>
-          <a:solidFill>
-            <a:srgbClr val="F1F5F9"/>
-          </a:solidFill>
-          <a:ln w="12700">
-            <a:solidFill>
-              <a:srgbClr val="F1F5F9"/>
-            </a:solidFill>
-            <a:prstDash val="solid"/>
-          </a:ln>
-        </p:spPr>
-      </p:sp>
-      <p:sp>
-        <p:nvSpPr>
-          <p:cNvPr id="35" name="Text 31"/>
-          <p:cNvSpPr txBox="1"/>
-          <p:nvPr/>
-        </p:nvSpPr>
-        <p:spPr>
-          <a:xfrm>
-            <a:off x="3977640" y="5285232"/>
-            <a:ext cx="1645920" cy="676656"/>
-          </a:xfrm>
-          <a:prstGeom prst="rect">
-            <a:avLst/>
-          </a:prstGeom>
-          <a:noFill/>
-          <a:ln/>
-        </p:spPr>
-        <p:txBody>
-          <a:bodyPr wrap="square" lIns="0" tIns="0" rIns="0" bIns="0" rtlCol="0" anchor="ctr"/>
-          <a:lstStyle/>
-          <a:p>
-            <a:pPr indent="0" marL="0">
-              <a:buNone/>
-            </a:pPr>
-            <a:r>
-              <a:rPr lang="en-US" sz="1300" b="1" dirty="0">
-                <a:solidFill>
-                  <a:srgbClr val="0B1929"/>
-                </a:solidFill>
-                <a:latin typeface="Calibri" pitchFamily="34" charset="0"/>
-                <a:ea typeface="Calibri" pitchFamily="34" charset="-122"/>
-                <a:cs typeface="Calibri" pitchFamily="34" charset="-120"/>
-              </a:rPr>
-              <a:t>Search metadata</a:t>
-            </a:r>
-            <a:endParaRPr lang="en-US" sz="1300" dirty="0"/>
-          </a:p>
-        </p:txBody>
-      </p:sp>
-      <p:sp>
-        <p:nvSpPr>
-          <p:cNvPr id="36" name="Text 32"/>
-          <p:cNvSpPr txBox="1"/>
-          <p:nvPr/>
-        </p:nvSpPr>
-        <p:spPr>
-          <a:xfrm>
-            <a:off x="5669280" y="5285232"/>
-            <a:ext cx="2377440" cy="676656"/>
-          </a:xfrm>
-          <a:prstGeom prst="rect">
-            <a:avLst/>
-          </a:prstGeom>
-          <a:noFill/>
-          <a:ln/>
-        </p:spPr>
-        <p:txBody>
-          <a:bodyPr wrap="square" lIns="0" tIns="0" rIns="0" bIns="0" rtlCol="0" anchor="ctr"/>
-          <a:lstStyle/>
-          <a:p>
-            <a:pPr indent="0" marL="0">
-              <a:buNone/>
-            </a:pPr>
-            <a:r>
-              <a:rPr lang="en-US" sz="1150" dirty="0">
-                <a:solidFill>
-                  <a:srgbClr val="0F172A"/>
-                </a:solidFill>
-                <a:latin typeface="Calibri" pitchFamily="34" charset="0"/>
-                <a:ea typeface="Calibri" pitchFamily="34" charset="-122"/>
-                <a:cs typeface="Calibri" pitchFamily="34" charset="-120"/>
-              </a:rPr>
-              <a:t>Some pages lack descriptions or clear headings</a:t>
-            </a:r>
-            <a:endParaRPr lang="en-US" sz="1150" dirty="0"/>
-          </a:p>
-        </p:txBody>
-      </p:sp>
-      <p:sp>
-        <p:nvSpPr>
-          <p:cNvPr id="37" name="Text 33"/>
-          <p:cNvSpPr txBox="1"/>
-          <p:nvPr/>
-        </p:nvSpPr>
-        <p:spPr>
-          <a:xfrm>
-            <a:off x="8183880" y="5285232"/>
-            <a:ext cx="1371600" cy="676656"/>
-          </a:xfrm>
-          <a:prstGeom prst="rect">
-            <a:avLst/>
-          </a:prstGeom>
-          <a:noFill/>
-          <a:ln/>
-        </p:spPr>
-        <p:txBody>
-          <a:bodyPr wrap="square" lIns="0" tIns="0" rIns="0" bIns="0" rtlCol="0" anchor="ctr"/>
-          <a:lstStyle/>
-          <a:p>
-            <a:pPr indent="0" marL="0">
-              <a:buNone/>
-            </a:pPr>
-            <a:r>
-              <a:rPr lang="en-US" sz="1150" dirty="0">
-                <a:solidFill>
-                  <a:srgbClr val="0F172A"/>
-                </a:solidFill>
-                <a:latin typeface="Calibri" pitchFamily="34" charset="0"/>
-                <a:ea typeface="Calibri" pitchFamily="34" charset="-122"/>
-                <a:cs typeface="Calibri" pitchFamily="34" charset="-120"/>
-              </a:rPr>
-              <a:t>Recommended</a:t>
-            </a:r>
-            <a:endParaRPr lang="en-US" sz="1150" dirty="0"/>
-          </a:p>
-        </p:txBody>
-      </p:sp>
-      <p:sp>
-        <p:nvSpPr>
-          <p:cNvPr id="38" name="Text 34"/>
-          <p:cNvSpPr txBox="1"/>
-          <p:nvPr/>
-        </p:nvSpPr>
-        <p:spPr>
-          <a:xfrm>
-            <a:off x="9646920" y="5285232"/>
-            <a:ext cx="1874520" cy="676656"/>
-          </a:xfrm>
-          <a:prstGeom prst="rect">
-            <a:avLst/>
-          </a:prstGeom>
-          <a:noFill/>
-          <a:ln/>
-        </p:spPr>
-        <p:txBody>
-          <a:bodyPr wrap="square" lIns="0" tIns="0" rIns="0" bIns="0" rtlCol="0" anchor="ctr"/>
-          <a:lstStyle/>
-          <a:p>
-            <a:pPr indent="0" marL="0">
-              <a:buNone/>
-            </a:pPr>
-            <a:r>
-              <a:rPr lang="en-US" sz="1150" dirty="0">
-                <a:solidFill>
-                  <a:srgbClr val="0F172A"/>
-                </a:solidFill>
-                <a:latin typeface="Calibri" pitchFamily="34" charset="0"/>
-                <a:ea typeface="Calibri" pitchFamily="34" charset="-122"/>
-                <a:cs typeface="Calibri" pitchFamily="34" charset="-120"/>
-              </a:rPr>
-              <a:t>Clearer listings in search results</a:t>
             </a:r>
             <a:endParaRPr lang="en-US" sz="1150" dirty="0"/>
           </a:p>
@@ -4135,7 +3573,7 @@
           <a:bodyPr wrap="square" lIns="0" tIns="0" rIns="0" bIns="0" rtlCol="0" anchor="ctr"/>
           <a:lstStyle/>
           <a:p>
-            <a:pPr indent="0" marL="0">
+            <a:pPr marL="0" indent="0">
               <a:buNone/>
             </a:pPr>
             <a:r>
@@ -4150,6 +3588,186 @@
               <a:t>Addressed this month: none applied (review only). Full details are in the internal audit.</a:t>
             </a:r>
             <a:endParaRPr lang="en-US" sz="1100" dirty="0"/>
+          </a:p>
+        </p:txBody>
+      </p:sp>
+      <p:sp>
+        <p:nvSpPr>
+          <p:cNvPr id="46" name="Text 31">
+            <a:extLst>
+              <a:ext uri="{FF2B5EF4-FFF2-40B4-BE49-F238E27FC236}">
+                <a16:creationId xmlns:a16="http://schemas.microsoft.com/office/drawing/2014/main" id="{8446EB05-4F78-DDC8-7660-89C5C3D58CFF}"/>
+              </a:ext>
+            </a:extLst>
+          </p:cNvPr>
+          <p:cNvSpPr txBox="1"/>
+          <p:nvPr/>
+        </p:nvSpPr>
+        <p:spPr>
+          <a:xfrm>
+            <a:off x="3977640" y="2753498"/>
+            <a:ext cx="1645920" cy="676656"/>
+          </a:xfrm>
+          <a:prstGeom prst="rect">
+            <a:avLst/>
+          </a:prstGeom>
+          <a:noFill/>
+          <a:ln/>
+        </p:spPr>
+        <p:txBody>
+          <a:bodyPr wrap="square" lIns="0" tIns="0" rIns="0" bIns="0" rtlCol="0" anchor="ctr"/>
+          <a:lstStyle/>
+          <a:p>
+            <a:pPr marL="0" indent="0">
+              <a:buNone/>
+            </a:pPr>
+            <a:r>
+              <a:rPr lang="en-US" sz="1300" b="1" dirty="0">
+                <a:solidFill>
+                  <a:srgbClr val="0B1929"/>
+                </a:solidFill>
+                <a:latin typeface="Calibri" pitchFamily="34" charset="0"/>
+                <a:ea typeface="Calibri" pitchFamily="34" charset="-122"/>
+                <a:cs typeface="Calibri" pitchFamily="34" charset="-120"/>
+              </a:rPr>
+              <a:t>Search metadata</a:t>
+            </a:r>
+            <a:endParaRPr lang="en-US" sz="1300" dirty="0"/>
+          </a:p>
+        </p:txBody>
+      </p:sp>
+      <p:sp>
+        <p:nvSpPr>
+          <p:cNvPr id="47" name="Text 32">
+            <a:extLst>
+              <a:ext uri="{FF2B5EF4-FFF2-40B4-BE49-F238E27FC236}">
+                <a16:creationId xmlns:a16="http://schemas.microsoft.com/office/drawing/2014/main" id="{76AB62B5-9AE1-8910-4B71-51DDBA933CAD}"/>
+              </a:ext>
+            </a:extLst>
+          </p:cNvPr>
+          <p:cNvSpPr txBox="1"/>
+          <p:nvPr/>
+        </p:nvSpPr>
+        <p:spPr>
+          <a:xfrm>
+            <a:off x="5669280" y="2753498"/>
+            <a:ext cx="2377440" cy="676656"/>
+          </a:xfrm>
+          <a:prstGeom prst="rect">
+            <a:avLst/>
+          </a:prstGeom>
+          <a:noFill/>
+          <a:ln/>
+        </p:spPr>
+        <p:txBody>
+          <a:bodyPr wrap="square" lIns="0" tIns="0" rIns="0" bIns="0" rtlCol="0" anchor="ctr"/>
+          <a:lstStyle/>
+          <a:p>
+            <a:pPr marL="0" indent="0">
+              <a:buNone/>
+            </a:pPr>
+            <a:r>
+              <a:rPr lang="en-US" sz="1150" dirty="0">
+                <a:solidFill>
+                  <a:srgbClr val="0F172A"/>
+                </a:solidFill>
+                <a:latin typeface="Calibri" pitchFamily="34" charset="0"/>
+                <a:ea typeface="Calibri" pitchFamily="34" charset="-122"/>
+                <a:cs typeface="Calibri" pitchFamily="34" charset="-120"/>
+              </a:rPr>
+              <a:t>Some pages lack descriptions or clear headings</a:t>
+            </a:r>
+            <a:endParaRPr lang="en-US" sz="1150" dirty="0"/>
+          </a:p>
+        </p:txBody>
+      </p:sp>
+      <p:sp>
+        <p:nvSpPr>
+          <p:cNvPr id="48" name="Text 33">
+            <a:extLst>
+              <a:ext uri="{FF2B5EF4-FFF2-40B4-BE49-F238E27FC236}">
+                <a16:creationId xmlns:a16="http://schemas.microsoft.com/office/drawing/2014/main" id="{7FE7A4F8-01C8-501C-53BB-3093F821C15E}"/>
+              </a:ext>
+            </a:extLst>
+          </p:cNvPr>
+          <p:cNvSpPr txBox="1"/>
+          <p:nvPr/>
+        </p:nvSpPr>
+        <p:spPr>
+          <a:xfrm>
+            <a:off x="8183880" y="2753498"/>
+            <a:ext cx="1371600" cy="676656"/>
+          </a:xfrm>
+          <a:prstGeom prst="rect">
+            <a:avLst/>
+          </a:prstGeom>
+          <a:noFill/>
+          <a:ln/>
+        </p:spPr>
+        <p:txBody>
+          <a:bodyPr wrap="square" lIns="0" tIns="0" rIns="0" bIns="0" rtlCol="0" anchor="ctr"/>
+          <a:lstStyle/>
+          <a:p>
+            <a:pPr marL="0" indent="0">
+              <a:buNone/>
+            </a:pPr>
+            <a:r>
+              <a:rPr lang="en-US" sz="1150" dirty="0">
+                <a:solidFill>
+                  <a:srgbClr val="0F172A"/>
+                </a:solidFill>
+                <a:latin typeface="Calibri" pitchFamily="34" charset="0"/>
+                <a:ea typeface="Calibri" pitchFamily="34" charset="-122"/>
+                <a:cs typeface="Calibri" pitchFamily="34" charset="-120"/>
+              </a:rPr>
+              <a:t>Recommended</a:t>
+            </a:r>
+            <a:endParaRPr lang="en-US" sz="1150" dirty="0"/>
+          </a:p>
+        </p:txBody>
+      </p:sp>
+      <p:sp>
+        <p:nvSpPr>
+          <p:cNvPr id="49" name="Text 34">
+            <a:extLst>
+              <a:ext uri="{FF2B5EF4-FFF2-40B4-BE49-F238E27FC236}">
+                <a16:creationId xmlns:a16="http://schemas.microsoft.com/office/drawing/2014/main" id="{33B4967C-B163-ED0A-897A-DA8E7E08BB12}"/>
+              </a:ext>
+            </a:extLst>
+          </p:cNvPr>
+          <p:cNvSpPr txBox="1"/>
+          <p:nvPr/>
+        </p:nvSpPr>
+        <p:spPr>
+          <a:xfrm>
+            <a:off x="9646920" y="2753498"/>
+            <a:ext cx="1874520" cy="676656"/>
+          </a:xfrm>
+          <a:prstGeom prst="rect">
+            <a:avLst/>
+          </a:prstGeom>
+          <a:noFill/>
+          <a:ln/>
+        </p:spPr>
+        <p:txBody>
+          <a:bodyPr wrap="square" lIns="0" tIns="0" rIns="0" bIns="0" rtlCol="0" anchor="ctr"/>
+          <a:lstStyle/>
+          <a:p>
+            <a:pPr marL="0" indent="0">
+              <a:buNone/>
+            </a:pPr>
+            <a:r>
+              <a:rPr lang="en-US" sz="1150" dirty="0">
+                <a:solidFill>
+                  <a:srgbClr val="0F172A"/>
+                </a:solidFill>
+                <a:latin typeface="Calibri" pitchFamily="34" charset="0"/>
+                <a:ea typeface="Calibri" pitchFamily="34" charset="-122"/>
+                <a:cs typeface="Calibri" pitchFamily="34" charset="-120"/>
+              </a:rPr>
+              <a:t>Clearer listings in search results</a:t>
+            </a:r>
+            <a:endParaRPr lang="en-US" sz="1150" dirty="0"/>
           </a:p>
         </p:txBody>
       </p:sp>
@@ -4169,6 +3787,7 @@
         <a:solidFill>
           <a:srgbClr val="FFFFFF"/>
         </a:solidFill>
+        <a:effectLst/>
       </p:bgPr>
     </p:bg>
     <p:spTree>
@@ -4206,11 +3825,11 @@
           <a:bodyPr wrap="square" lIns="0" tIns="0" rIns="0" bIns="0" rtlCol="0" anchor="ctr"/>
           <a:lstStyle/>
           <a:p>
-            <a:pPr indent="0" marL="0">
-              <a:buNone/>
-            </a:pPr>
-            <a:r>
-              <a:rPr lang="en-US" sz="1200" b="1" spc="300" kern="0" dirty="0">
+            <a:pPr marL="0" indent="0">
+              <a:buNone/>
+            </a:pPr>
+            <a:r>
+              <a:rPr lang="en-US" sz="1200" b="1" kern="0" spc="300" dirty="0">
                 <a:solidFill>
                   <a:srgbClr val="0086C7"/>
                 </a:solidFill>
@@ -4226,14 +3845,14 @@
       </p:sp>
       <p:pic>
         <p:nvPicPr>
-          <p:cNvPr id="3" name="Image 0" descr="C:/Projects/OGH/build/brand/logo_color_big.png">    </p:cNvPr>
+          <p:cNvPr id="3" name="Image 0" descr="C:/Projects/OGH/build/brand/logo_color_big.png"/>
           <p:cNvPicPr>
             <a:picLocks noChangeAspect="1"/>
           </p:cNvPicPr>
           <p:nvPr/>
         </p:nvPicPr>
         <p:blipFill>
-          <a:blip r:embed="rId1"/>
+          <a:blip r:embed="rId3"/>
           <a:stretch>
             <a:fillRect/>
           </a:stretch>
@@ -4269,7 +3888,7 @@
           <a:bodyPr wrap="square" lIns="0" tIns="0" rIns="0" bIns="0" rtlCol="0" anchor="t"/>
           <a:lstStyle/>
           <a:p>
-            <a:pPr indent="0" marL="0">
+            <a:pPr marL="0" indent="0">
               <a:buNone/>
             </a:pPr>
             <a:r>
@@ -4308,7 +3927,7 @@
           <a:bodyPr wrap="square" lIns="0" tIns="0" rIns="0" bIns="0" rtlCol="0" anchor="ctr"/>
           <a:lstStyle/>
           <a:p>
-            <a:pPr indent="0" marL="0">
+            <a:pPr marL="0" indent="0">
               <a:buNone/>
             </a:pPr>
             <a:r>
@@ -4347,7 +3966,7 @@
           <a:bodyPr wrap="square" lIns="0" tIns="0" rIns="0" bIns="0" rtlCol="0" anchor="ctr"/>
           <a:lstStyle/>
           <a:p>
-            <a:pPr algn="r" indent="0" marL="0">
+            <a:pPr marL="0" indent="0" algn="r">
               <a:buNone/>
             </a:pPr>
             <a:r>
@@ -4413,7 +4032,7 @@
           <a:bodyPr wrap="square" lIns="0" tIns="0" rIns="0" bIns="0" rtlCol="0" anchor="ctr"/>
           <a:lstStyle/>
           <a:p>
-            <a:pPr indent="0" marL="0">
+            <a:pPr marL="0" indent="0">
               <a:buNone/>
             </a:pPr>
             <a:r>
@@ -4479,7 +4098,7 @@
           <a:bodyPr wrap="square" lIns="0" tIns="0" rIns="0" bIns="0" rtlCol="0" anchor="ctr"/>
           <a:lstStyle/>
           <a:p>
-            <a:pPr algn="ctr" indent="0" marL="0">
+            <a:pPr marL="0" indent="0" algn="ctr">
               <a:buNone/>
             </a:pPr>
             <a:r>
@@ -4518,7 +4137,7 @@
           <a:bodyPr wrap="square" lIns="0" tIns="0" rIns="0" bIns="0" rtlCol="0" anchor="t"/>
           <a:lstStyle/>
           <a:p>
-            <a:pPr indent="0" marL="0">
+            <a:pPr marL="0" indent="0">
               <a:buNone/>
             </a:pPr>
             <a:r>
@@ -4584,7 +4203,7 @@
           <a:bodyPr wrap="square" lIns="0" tIns="0" rIns="0" bIns="0" rtlCol="0" anchor="ctr"/>
           <a:lstStyle/>
           <a:p>
-            <a:pPr indent="0" marL="0">
+            <a:pPr marL="0" indent="0">
               <a:buNone/>
             </a:pPr>
             <a:r>
@@ -4650,7 +4269,7 @@
           <a:bodyPr wrap="square" lIns="0" tIns="0" rIns="0" bIns="0" rtlCol="0" anchor="ctr"/>
           <a:lstStyle/>
           <a:p>
-            <a:pPr algn="ctr" indent="0" marL="0">
+            <a:pPr marL="0" indent="0" algn="ctr">
               <a:buNone/>
             </a:pPr>
             <a:r>
@@ -4689,7 +4308,7 @@
           <a:bodyPr wrap="square" lIns="0" tIns="0" rIns="0" bIns="0" rtlCol="0" anchor="t"/>
           <a:lstStyle/>
           <a:p>
-            <a:pPr indent="0" marL="0">
+            <a:pPr marL="0" indent="0">
               <a:buNone/>
             </a:pPr>
             <a:r>
@@ -4755,7 +4374,7 @@
           <a:bodyPr wrap="square" lIns="0" tIns="0" rIns="0" bIns="0" rtlCol="0" anchor="ctr"/>
           <a:lstStyle/>
           <a:p>
-            <a:pPr indent="0" marL="0">
+            <a:pPr marL="0" indent="0">
               <a:buNone/>
             </a:pPr>
             <a:r>
@@ -4821,7 +4440,7 @@
           <a:bodyPr wrap="square" lIns="0" tIns="0" rIns="0" bIns="0" rtlCol="0" anchor="ctr"/>
           <a:lstStyle/>
           <a:p>
-            <a:pPr algn="ctr" indent="0" marL="0">
+            <a:pPr marL="0" indent="0" algn="ctr">
               <a:buNone/>
             </a:pPr>
             <a:r>
@@ -4860,7 +4479,7 @@
           <a:bodyPr wrap="square" lIns="0" tIns="0" rIns="0" bIns="0" rtlCol="0" anchor="t"/>
           <a:lstStyle/>
           <a:p>
-            <a:pPr indent="0" marL="0">
+            <a:pPr marL="0" indent="0">
               <a:buNone/>
             </a:pPr>
             <a:r>
@@ -4926,7 +4545,7 @@
           <a:bodyPr wrap="square" lIns="0" tIns="0" rIns="0" bIns="0" rtlCol="0" anchor="ctr"/>
           <a:lstStyle/>
           <a:p>
-            <a:pPr indent="0" marL="0">
+            <a:pPr marL="0" indent="0">
               <a:buNone/>
             </a:pPr>
             <a:r>
@@ -4992,7 +4611,7 @@
           <a:bodyPr wrap="square" lIns="0" tIns="0" rIns="0" bIns="0" rtlCol="0" anchor="ctr"/>
           <a:lstStyle/>
           <a:p>
-            <a:pPr algn="ctr" indent="0" marL="0">
+            <a:pPr marL="0" indent="0" algn="ctr">
               <a:buNone/>
             </a:pPr>
             <a:r>
@@ -5031,7 +4650,7 @@
           <a:bodyPr wrap="square" lIns="0" tIns="0" rIns="0" bIns="0" rtlCol="0" anchor="t"/>
           <a:lstStyle/>
           <a:p>
-            <a:pPr indent="0" marL="0">
+            <a:pPr marL="0" indent="0">
               <a:buNone/>
             </a:pPr>
             <a:r>
@@ -5097,7 +4716,7 @@
           <a:bodyPr wrap="square" lIns="0" tIns="0" rIns="0" bIns="0" rtlCol="0" anchor="ctr"/>
           <a:lstStyle/>
           <a:p>
-            <a:pPr indent="0" marL="0">
+            <a:pPr marL="0" indent="0">
               <a:buNone/>
             </a:pPr>
             <a:r>
@@ -5163,7 +4782,7 @@
           <a:bodyPr wrap="square" lIns="0" tIns="0" rIns="0" bIns="0" rtlCol="0" anchor="ctr"/>
           <a:lstStyle/>
           <a:p>
-            <a:pPr algn="ctr" indent="0" marL="0">
+            <a:pPr marL="0" indent="0" algn="ctr">
               <a:buNone/>
             </a:pPr>
             <a:r>
@@ -5202,7 +4821,7 @@
           <a:bodyPr wrap="square" lIns="0" tIns="0" rIns="0" bIns="0" rtlCol="0" anchor="t"/>
           <a:lstStyle/>
           <a:p>
-            <a:pPr indent="0" marL="0">
+            <a:pPr marL="0" indent="0">
               <a:buNone/>
             </a:pPr>
             <a:r>
@@ -5268,7 +4887,7 @@
           <a:bodyPr wrap="square" lIns="0" tIns="0" rIns="0" bIns="0" rtlCol="0" anchor="ctr"/>
           <a:lstStyle/>
           <a:p>
-            <a:pPr indent="0" marL="0">
+            <a:pPr marL="0" indent="0">
               <a:buNone/>
             </a:pPr>
             <a:r>
@@ -5334,7 +4953,7 @@
           <a:bodyPr wrap="square" lIns="0" tIns="0" rIns="0" bIns="0" rtlCol="0" anchor="ctr"/>
           <a:lstStyle/>
           <a:p>
-            <a:pPr algn="ctr" indent="0" marL="0">
+            <a:pPr marL="0" indent="0" algn="ctr">
               <a:buNone/>
             </a:pPr>
             <a:r>
@@ -5373,7 +4992,7 @@
           <a:bodyPr wrap="square" lIns="0" tIns="0" rIns="0" bIns="0" rtlCol="0" anchor="t"/>
           <a:lstStyle/>
           <a:p>
-            <a:pPr indent="0" marL="0">
+            <a:pPr marL="0" indent="0">
               <a:buNone/>
             </a:pPr>
             <a:r>
@@ -5439,7 +5058,7 @@
           <a:bodyPr wrap="square" lIns="0" tIns="0" rIns="0" bIns="0" rtlCol="0" anchor="ctr"/>
           <a:lstStyle/>
           <a:p>
-            <a:pPr indent="0" marL="0">
+            <a:pPr marL="0" indent="0">
               <a:buNone/>
             </a:pPr>
             <a:r>
@@ -5505,7 +5124,7 @@
           <a:bodyPr wrap="square" lIns="0" tIns="0" rIns="0" bIns="0" rtlCol="0" anchor="ctr"/>
           <a:lstStyle/>
           <a:p>
-            <a:pPr algn="ctr" indent="0" marL="0">
+            <a:pPr marL="0" indent="0" algn="ctr">
               <a:buNone/>
             </a:pPr>
             <a:r>
@@ -5544,7 +5163,7 @@
           <a:bodyPr wrap="square" lIns="0" tIns="0" rIns="0" bIns="0" rtlCol="0" anchor="t"/>
           <a:lstStyle/>
           <a:p>
-            <a:pPr indent="0" marL="0">
+            <a:pPr marL="0" indent="0">
               <a:buNone/>
             </a:pPr>
             <a:r>
@@ -5610,7 +5229,7 @@
           <a:bodyPr wrap="square" lIns="0" tIns="0" rIns="0" bIns="0" rtlCol="0" anchor="ctr"/>
           <a:lstStyle/>
           <a:p>
-            <a:pPr indent="0" marL="0">
+            <a:pPr marL="0" indent="0">
               <a:buNone/>
             </a:pPr>
             <a:r>
@@ -5676,7 +5295,7 @@
           <a:bodyPr wrap="square" lIns="0" tIns="0" rIns="0" bIns="0" rtlCol="0" anchor="ctr"/>
           <a:lstStyle/>
           <a:p>
-            <a:pPr algn="ctr" indent="0" marL="0">
+            <a:pPr marL="0" indent="0" algn="ctr">
               <a:buNone/>
             </a:pPr>
             <a:r>
@@ -5715,7 +5334,7 @@
           <a:bodyPr wrap="square" lIns="0" tIns="0" rIns="0" bIns="0" rtlCol="0" anchor="t"/>
           <a:lstStyle/>
           <a:p>
-            <a:pPr indent="0" marL="0">
+            <a:pPr marL="0" indent="0">
               <a:buNone/>
             </a:pPr>
             <a:r>
@@ -5781,7 +5400,7 @@
           <a:bodyPr wrap="square" lIns="0" tIns="0" rIns="0" bIns="0" rtlCol="0" anchor="ctr"/>
           <a:lstStyle/>
           <a:p>
-            <a:pPr indent="0" marL="0">
+            <a:pPr marL="0" indent="0">
               <a:buNone/>
             </a:pPr>
             <a:r>
@@ -5847,7 +5466,7 @@
           <a:bodyPr wrap="square" lIns="0" tIns="0" rIns="0" bIns="0" rtlCol="0" anchor="ctr"/>
           <a:lstStyle/>
           <a:p>
-            <a:pPr algn="ctr" indent="0" marL="0">
+            <a:pPr marL="0" indent="0" algn="ctr">
               <a:buNone/>
             </a:pPr>
             <a:r>
@@ -5886,7 +5505,7 @@
           <a:bodyPr wrap="square" lIns="0" tIns="0" rIns="0" bIns="0" rtlCol="0" anchor="t"/>
           <a:lstStyle/>
           <a:p>
-            <a:pPr indent="0" marL="0">
+            <a:pPr marL="0" indent="0">
               <a:buNone/>
             </a:pPr>
             <a:r>
@@ -5925,7 +5544,7 @@
           <a:bodyPr wrap="square" lIns="0" tIns="0" rIns="0" bIns="0" rtlCol="0" anchor="ctr"/>
           <a:lstStyle/>
           <a:p>
-            <a:pPr indent="0" marL="0">
+            <a:pPr marL="0" indent="0">
               <a:buNone/>
             </a:pPr>
             <a:r>
@@ -5937,7 +5556,7 @@
                 <a:ea typeface="Calibri" pitchFamily="34" charset="-122"/>
                 <a:cs typeface="Calibri" pitchFamily="34" charset="-120"/>
               </a:rPr>
-              <a:t>Statuses reflect this month's review only. Other browsers, forms and payments were not tested.</a:t>
+              <a:t>Statuses reflect this month's review only. Forms and payments were not tested.</a:t>
             </a:r>
             <a:endParaRPr lang="en-US" sz="1100" dirty="0"/>
           </a:p>
@@ -5959,6 +5578,7 @@
         <a:solidFill>
           <a:srgbClr val="0B1929"/>
         </a:solidFill>
+        <a:effectLst/>
       </p:bgPr>
     </p:bg>
     <p:spTree>
@@ -5977,14 +5597,14 @@
       </p:grpSpPr>
       <p:pic>
         <p:nvPicPr>
-          <p:cNvPr id="2" name="Image 0" descr="C:/Projects/OGH/build/brand/logo_white.png">    </p:cNvPr>
+          <p:cNvPr id="2" name="Image 0" descr="C:/Projects/OGH/build/brand/logo_white.png"/>
           <p:cNvPicPr>
             <a:picLocks noChangeAspect="1"/>
           </p:cNvPicPr>
           <p:nvPr/>
         </p:nvPicPr>
         <p:blipFill>
-          <a:blip r:embed="rId1"/>
+          <a:blip r:embed="rId3"/>
           <a:stretch>
             <a:fillRect/>
           </a:stretch>
@@ -6020,7 +5640,7 @@
           <a:bodyPr wrap="square" lIns="0" tIns="0" rIns="0" bIns="0" rtlCol="0" anchor="ctr"/>
           <a:lstStyle/>
           <a:p>
-            <a:pPr indent="0" marL="0">
+            <a:pPr marL="0" indent="0">
               <a:buNone/>
             </a:pPr>
             <a:r>
@@ -6059,7 +5679,7 @@
           <a:bodyPr wrap="square" lIns="0" tIns="0" rIns="0" bIns="0" rtlCol="0" anchor="t"/>
           <a:lstStyle/>
           <a:p>
-            <a:pPr indent="0" marL="0">
+            <a:pPr marL="0" indent="0">
               <a:buNone/>
             </a:pPr>
             <a:r>
@@ -6135,14 +5755,14 @@
       </p:sp>
       <p:pic>
         <p:nvPicPr>
-          <p:cNvPr id="7" name="Image 1" descr="preencoded.png">    </p:cNvPr>
+          <p:cNvPr id="7" name="Image 1" descr="preencoded.png"/>
           <p:cNvPicPr>
             <a:picLocks noChangeAspect="1"/>
           </p:cNvPicPr>
           <p:nvPr/>
         </p:nvPicPr>
         <p:blipFill>
-          <a:blip r:embed="rId2"/>
+          <a:blip r:embed="rId4"/>
           <a:stretch>
             <a:fillRect/>
           </a:stretch>
@@ -6178,7 +5798,7 @@
           <a:bodyPr wrap="square" lIns="0" tIns="0" rIns="0" bIns="0" rtlCol="0" anchor="t"/>
           <a:lstStyle/>
           <a:p>
-            <a:pPr indent="0" marL="0">
+            <a:pPr marL="0" indent="0">
               <a:buNone/>
             </a:pPr>
             <a:r>
@@ -6254,14 +5874,14 @@
       </p:sp>
       <p:pic>
         <p:nvPicPr>
-          <p:cNvPr id="11" name="Image 2" descr="preencoded.png">    </p:cNvPr>
+          <p:cNvPr id="11" name="Image 2" descr="preencoded.png"/>
           <p:cNvPicPr>
             <a:picLocks noChangeAspect="1"/>
           </p:cNvPicPr>
           <p:nvPr/>
         </p:nvPicPr>
         <p:blipFill>
-          <a:blip r:embed="rId3"/>
+          <a:blip r:embed="rId5"/>
           <a:stretch>
             <a:fillRect/>
           </a:stretch>
@@ -6297,7 +5917,7 @@
           <a:bodyPr wrap="square" lIns="0" tIns="0" rIns="0" bIns="0" rtlCol="0" anchor="t"/>
           <a:lstStyle/>
           <a:p>
-            <a:pPr indent="0" marL="0">
+            <a:pPr marL="0" indent="0">
               <a:buNone/>
             </a:pPr>
             <a:r>
@@ -6373,14 +5993,14 @@
       </p:sp>
       <p:pic>
         <p:nvPicPr>
-          <p:cNvPr id="15" name="Image 3" descr="preencoded.png">    </p:cNvPr>
+          <p:cNvPr id="15" name="Image 3" descr="preencoded.png"/>
           <p:cNvPicPr>
             <a:picLocks noChangeAspect="1"/>
           </p:cNvPicPr>
           <p:nvPr/>
         </p:nvPicPr>
         <p:blipFill>
-          <a:blip r:embed="rId4"/>
+          <a:blip r:embed="rId6"/>
           <a:stretch>
             <a:fillRect/>
           </a:stretch>
@@ -6416,7 +6036,7 @@
           <a:bodyPr wrap="square" lIns="0" tIns="0" rIns="0" bIns="0" rtlCol="0" anchor="t"/>
           <a:lstStyle/>
           <a:p>
-            <a:pPr indent="0" marL="0">
+            <a:pPr marL="0" indent="0">
               <a:buNone/>
             </a:pPr>
             <a:r>
@@ -6492,14 +6112,14 @@
       </p:sp>
       <p:pic>
         <p:nvPicPr>
-          <p:cNvPr id="19" name="Image 4" descr="preencoded.png">    </p:cNvPr>
+          <p:cNvPr id="19" name="Image 4" descr="preencoded.png"/>
           <p:cNvPicPr>
             <a:picLocks noChangeAspect="1"/>
           </p:cNvPicPr>
           <p:nvPr/>
         </p:nvPicPr>
         <p:blipFill>
-          <a:blip r:embed="rId5"/>
+          <a:blip r:embed="rId7"/>
           <a:stretch>
             <a:fillRect/>
           </a:stretch>
@@ -6535,7 +6155,7 @@
           <a:bodyPr wrap="square" lIns="0" tIns="0" rIns="0" bIns="0" rtlCol="0" anchor="t"/>
           <a:lstStyle/>
           <a:p>
-            <a:pPr indent="0" marL="0">
+            <a:pPr marL="0" indent="0">
               <a:buNone/>
             </a:pPr>
             <a:r>
@@ -6547,7 +6167,7 @@
                 <a:ea typeface="Calibri" pitchFamily="34" charset="-122"/>
                 <a:cs typeface="Calibri" pitchFamily="34" charset="-120"/>
               </a:rPr>
-              <a:t>SEO health</a:t>
+              <a:t>SEO health and AEO/GEO Tests</a:t>
             </a:r>
             <a:endParaRPr lang="en-US" sz="1400" dirty="0"/>
           </a:p>
@@ -6611,14 +6231,14 @@
       </p:sp>
       <p:pic>
         <p:nvPicPr>
-          <p:cNvPr id="23" name="Image 5" descr="preencoded.png">    </p:cNvPr>
+          <p:cNvPr id="23" name="Image 5" descr="preencoded.png"/>
           <p:cNvPicPr>
             <a:picLocks noChangeAspect="1"/>
           </p:cNvPicPr>
           <p:nvPr/>
         </p:nvPicPr>
         <p:blipFill>
-          <a:blip r:embed="rId6"/>
+          <a:blip r:embed="rId8"/>
           <a:stretch>
             <a:fillRect/>
           </a:stretch>
@@ -6654,7 +6274,7 @@
           <a:bodyPr wrap="square" lIns="0" tIns="0" rIns="0" bIns="0" rtlCol="0" anchor="t"/>
           <a:lstStyle/>
           <a:p>
-            <a:pPr indent="0" marL="0">
+            <a:pPr marL="0" indent="0">
               <a:buNone/>
             </a:pPr>
             <a:r>
@@ -6730,14 +6350,14 @@
       </p:sp>
       <p:pic>
         <p:nvPicPr>
-          <p:cNvPr id="27" name="Image 6" descr="preencoded.png">    </p:cNvPr>
+          <p:cNvPr id="27" name="Image 6" descr="preencoded.png"/>
           <p:cNvPicPr>
             <a:picLocks noChangeAspect="1"/>
           </p:cNvPicPr>
           <p:nvPr/>
         </p:nvPicPr>
         <p:blipFill>
-          <a:blip r:embed="rId7"/>
+          <a:blip r:embed="rId9"/>
           <a:stretch>
             <a:fillRect/>
           </a:stretch>
@@ -6773,7 +6393,7 @@
           <a:bodyPr wrap="square" lIns="0" tIns="0" rIns="0" bIns="0" rtlCol="0" anchor="t"/>
           <a:lstStyle/>
           <a:p>
-            <a:pPr indent="0" marL="0">
+            <a:pPr marL="0" indent="0">
               <a:buNone/>
             </a:pPr>
             <a:r>
@@ -6849,14 +6469,14 @@
       </p:sp>
       <p:pic>
         <p:nvPicPr>
-          <p:cNvPr id="31" name="Image 7" descr="preencoded.png">    </p:cNvPr>
+          <p:cNvPr id="31" name="Image 7" descr="preencoded.png"/>
           <p:cNvPicPr>
             <a:picLocks noChangeAspect="1"/>
           </p:cNvPicPr>
           <p:nvPr/>
         </p:nvPicPr>
         <p:blipFill>
-          <a:blip r:embed="rId8"/>
+          <a:blip r:embed="rId10"/>
           <a:stretch>
             <a:fillRect/>
           </a:stretch>
@@ -6892,7 +6512,7 @@
           <a:bodyPr wrap="square" lIns="0" tIns="0" rIns="0" bIns="0" rtlCol="0" anchor="t"/>
           <a:lstStyle/>
           <a:p>
-            <a:pPr indent="0" marL="0">
+            <a:pPr marL="0" indent="0">
               <a:buNone/>
             </a:pPr>
             <a:r>
@@ -6968,14 +6588,14 @@
       </p:sp>
       <p:pic>
         <p:nvPicPr>
-          <p:cNvPr id="35" name="Image 8" descr="preencoded.png">    </p:cNvPr>
+          <p:cNvPr id="35" name="Image 8" descr="preencoded.png"/>
           <p:cNvPicPr>
             <a:picLocks noChangeAspect="1"/>
           </p:cNvPicPr>
           <p:nvPr/>
         </p:nvPicPr>
         <p:blipFill>
-          <a:blip r:embed="rId9"/>
+          <a:blip r:embed="rId11"/>
           <a:stretch>
             <a:fillRect/>
           </a:stretch>
@@ -7011,7 +6631,7 @@
           <a:bodyPr wrap="square" lIns="0" tIns="0" rIns="0" bIns="0" rtlCol="0" anchor="t"/>
           <a:lstStyle/>
           <a:p>
-            <a:pPr indent="0" marL="0">
+            <a:pPr marL="0" indent="0">
               <a:buNone/>
             </a:pPr>
             <a:r>
@@ -7024,45 +6644,6 @@
                 <a:cs typeface="Calibri" pitchFamily="34" charset="-120"/>
               </a:rPr>
               <a:t>New website changes</a:t>
-            </a:r>
-            <a:endParaRPr lang="en-US" sz="1400" dirty="0"/>
-          </a:p>
-        </p:txBody>
-      </p:sp>
-      <p:sp>
-        <p:nvSpPr>
-          <p:cNvPr id="37" name="Text 26"/>
-          <p:cNvSpPr txBox="1"/>
-          <p:nvPr/>
-        </p:nvSpPr>
-        <p:spPr>
-          <a:xfrm>
-            <a:off x="731520" y="5943600"/>
-            <a:ext cx="10515600" cy="365760"/>
-          </a:xfrm>
-          <a:prstGeom prst="rect">
-            <a:avLst/>
-          </a:prstGeom>
-          <a:noFill/>
-          <a:ln/>
-        </p:spPr>
-        <p:txBody>
-          <a:bodyPr wrap="square" lIns="0" tIns="0" rIns="0" bIns="0" rtlCol="0" anchor="ctr"/>
-          <a:lstStyle/>
-          <a:p>
-            <a:pPr indent="0" marL="0">
-              <a:buNone/>
-            </a:pPr>
-            <a:r>
-              <a:rPr lang="en-US" sz="1400" i="1" dirty="0">
-                <a:solidFill>
-                  <a:srgbClr val="CBD5E1"/>
-                </a:solidFill>
-                <a:latin typeface="Calibri" pitchFamily="34" charset="0"/>
-                <a:ea typeface="Calibri" pitchFamily="34" charset="-122"/>
-                <a:cs typeface="Calibri" pitchFamily="34" charset="-120"/>
-              </a:rPr>
-              <a:t>Recommended next: browser testing beyond Chrome, and checkout validation in a safe test environment.</a:t>
             </a:r>
             <a:endParaRPr lang="en-US" sz="1400" dirty="0"/>
           </a:p>
@@ -7084,6 +6665,7 @@
         <a:solidFill>
           <a:srgbClr val="0B1929"/>
         </a:solidFill>
+        <a:effectLst/>
       </p:bgPr>
     </p:bg>
     <p:spTree>
@@ -7131,14 +6713,14 @@
       </p:sp>
       <p:pic>
         <p:nvPicPr>
-          <p:cNvPr id="3" name="Image 0" descr="C:/Projects/OGH/build/brand/logo_white.png">    </p:cNvPr>
+          <p:cNvPr id="3" name="Image 0" descr="C:/Projects/OGH/build/brand/logo_white.png"/>
           <p:cNvPicPr>
             <a:picLocks noChangeAspect="1"/>
           </p:cNvPicPr>
           <p:nvPr/>
         </p:nvPicPr>
         <p:blipFill>
-          <a:blip r:embed="rId1"/>
+          <a:blip r:embed="rId3"/>
           <a:stretch>
             <a:fillRect/>
           </a:stretch>
@@ -7174,7 +6756,7 @@
           <a:bodyPr wrap="square" lIns="0" tIns="0" rIns="0" bIns="0" rtlCol="0" anchor="t"/>
           <a:lstStyle/>
           <a:p>
-            <a:pPr indent="0" marL="0">
+            <a:pPr marL="0" indent="0">
               <a:buNone/>
             </a:pPr>
             <a:r>
@@ -7213,7 +6795,7 @@
           <a:bodyPr wrap="square" lIns="0" tIns="0" rIns="0" bIns="0" rtlCol="0" anchor="t"/>
           <a:lstStyle/>
           <a:p>
-            <a:pPr indent="0" marL="0">
+            <a:pPr marL="0" indent="0">
               <a:buNone/>
             </a:pPr>
             <a:r>
@@ -7252,7 +6834,7 @@
           <a:bodyPr wrap="square" lIns="0" tIns="0" rIns="0" bIns="0" rtlCol="0" anchor="t"/>
           <a:lstStyle/>
           <a:p>
-            <a:pPr indent="0" marL="0">
+            <a:pPr marL="0" indent="0">
               <a:buNone/>
             </a:pPr>
             <a:r>
@@ -7318,7 +6900,7 @@
           <a:bodyPr wrap="square" lIns="0" tIns="0" rIns="0" bIns="0" rtlCol="0" anchor="ctr"/>
           <a:lstStyle/>
           <a:p>
-            <a:pPr indent="0" marL="0">
+            <a:pPr marL="0" indent="0">
               <a:buNone/>
             </a:pPr>
             <a:r>
@@ -7363,14 +6945,14 @@
       </p:sp>
       <p:pic>
         <p:nvPicPr>
-          <p:cNvPr id="10" name="Image 1" descr="preencoded.png">    </p:cNvPr>
+          <p:cNvPr id="10" name="Image 1" descr="preencoded.png"/>
           <p:cNvPicPr>
             <a:picLocks noChangeAspect="1"/>
           </p:cNvPicPr>
           <p:nvPr/>
         </p:nvPicPr>
         <p:blipFill>
-          <a:blip r:embed="rId2"/>
+          <a:blip r:embed="rId4"/>
           <a:stretch>
             <a:fillRect/>
           </a:stretch>
@@ -7406,7 +6988,7 @@
           <a:bodyPr wrap="square" lIns="0" tIns="0" rIns="0" bIns="0" rtlCol="0" anchor="ctr"/>
           <a:lstStyle/>
           <a:p>
-            <a:pPr indent="0" marL="0">
+            <a:pPr marL="0" indent="0">
               <a:buNone/>
             </a:pPr>
             <a:r>
@@ -7445,7 +7027,7 @@
           <a:bodyPr wrap="square" lIns="0" tIns="0" rIns="0" bIns="0" rtlCol="0" anchor="ctr"/>
           <a:lstStyle/>
           <a:p>
-            <a:pPr indent="0" marL="0">
+            <a:pPr marL="0" indent="0">
               <a:buNone/>
             </a:pPr>
             <a:r>
@@ -7490,14 +7072,14 @@
       </p:sp>
       <p:pic>
         <p:nvPicPr>
-          <p:cNvPr id="14" name="Image 2" descr="preencoded.png">    </p:cNvPr>
+          <p:cNvPr id="14" name="Image 2" descr="preencoded.png"/>
           <p:cNvPicPr>
             <a:picLocks noChangeAspect="1"/>
           </p:cNvPicPr>
           <p:nvPr/>
         </p:nvPicPr>
         <p:blipFill>
-          <a:blip r:embed="rId3"/>
+          <a:blip r:embed="rId5"/>
           <a:stretch>
             <a:fillRect/>
           </a:stretch>
@@ -7533,7 +7115,7 @@
           <a:bodyPr wrap="square" lIns="0" tIns="0" rIns="0" bIns="0" rtlCol="0" anchor="ctr"/>
           <a:lstStyle/>
           <a:p>
-            <a:pPr indent="0" marL="0">
+            <a:pPr marL="0" indent="0">
               <a:buNone/>
             </a:pPr>
             <a:r>
@@ -7572,7 +7154,7 @@
           <a:bodyPr wrap="square" lIns="0" tIns="0" rIns="0" bIns="0" rtlCol="0" anchor="ctr"/>
           <a:lstStyle/>
           <a:p>
-            <a:pPr indent="0" marL="0">
+            <a:pPr marL="0" indent="0">
               <a:buNone/>
             </a:pPr>
             <a:r>
@@ -7617,14 +7199,14 @@
       </p:sp>
       <p:pic>
         <p:nvPicPr>
-          <p:cNvPr id="18" name="Image 3" descr="preencoded.png">    </p:cNvPr>
+          <p:cNvPr id="18" name="Image 3" descr="preencoded.png"/>
           <p:cNvPicPr>
             <a:picLocks noChangeAspect="1"/>
           </p:cNvPicPr>
           <p:nvPr/>
         </p:nvPicPr>
         <p:blipFill>
-          <a:blip r:embed="rId4"/>
+          <a:blip r:embed="rId5"/>
           <a:stretch>
             <a:fillRect/>
           </a:stretch>
@@ -7660,7 +7242,7 @@
           <a:bodyPr wrap="square" lIns="0" tIns="0" rIns="0" bIns="0" rtlCol="0" anchor="ctr"/>
           <a:lstStyle/>
           <a:p>
-            <a:pPr indent="0" marL="0">
+            <a:pPr marL="0" indent="0">
               <a:buNone/>
             </a:pPr>
             <a:r>
@@ -7699,7 +7281,7 @@
           <a:bodyPr wrap="square" lIns="0" tIns="0" rIns="0" bIns="0" rtlCol="0" anchor="ctr"/>
           <a:lstStyle/>
           <a:p>
-            <a:pPr indent="0" marL="0">
+            <a:pPr marL="0" indent="0">
               <a:buNone/>
             </a:pPr>
             <a:r>
@@ -7744,14 +7326,14 @@
       </p:sp>
       <p:pic>
         <p:nvPicPr>
-          <p:cNvPr id="22" name="Image 4" descr="preencoded.png">    </p:cNvPr>
+          <p:cNvPr id="22" name="Image 4" descr="preencoded.png"/>
           <p:cNvPicPr>
             <a:picLocks noChangeAspect="1"/>
           </p:cNvPicPr>
           <p:nvPr/>
         </p:nvPicPr>
         <p:blipFill>
-          <a:blip r:embed="rId5"/>
+          <a:blip r:embed="rId6"/>
           <a:stretch>
             <a:fillRect/>
           </a:stretch>
@@ -7787,7 +7369,7 @@
           <a:bodyPr wrap="square" lIns="0" tIns="0" rIns="0" bIns="0" rtlCol="0" anchor="ctr"/>
           <a:lstStyle/>
           <a:p>
-            <a:pPr indent="0" marL="0">
+            <a:pPr marL="0" indent="0">
               <a:buNone/>
             </a:pPr>
             <a:r>
@@ -7826,7 +7408,7 @@
           <a:bodyPr wrap="square" lIns="0" tIns="0" rIns="0" bIns="0" rtlCol="0" anchor="ctr"/>
           <a:lstStyle/>
           <a:p>
-            <a:pPr indent="0" marL="0">
+            <a:pPr marL="0" indent="0">
               <a:buNone/>
             </a:pPr>
             <a:r>
@@ -7871,14 +7453,14 @@
       </p:sp>
       <p:pic>
         <p:nvPicPr>
-          <p:cNvPr id="26" name="Image 5" descr="preencoded.png">    </p:cNvPr>
+          <p:cNvPr id="26" name="Image 5" descr="preencoded.png"/>
           <p:cNvPicPr>
             <a:picLocks noChangeAspect="1"/>
           </p:cNvPicPr>
           <p:nvPr/>
         </p:nvPicPr>
         <p:blipFill>
-          <a:blip r:embed="rId6"/>
+          <a:blip r:embed="rId7"/>
           <a:stretch>
             <a:fillRect/>
           </a:stretch>
@@ -7914,7 +7496,7 @@
           <a:bodyPr wrap="square" lIns="0" tIns="0" rIns="0" bIns="0" rtlCol="0" anchor="ctr"/>
           <a:lstStyle/>
           <a:p>
-            <a:pPr indent="0" marL="0">
+            <a:pPr marL="0" indent="0">
               <a:buNone/>
             </a:pPr>
             <a:r>
@@ -7953,7 +7535,7 @@
           <a:bodyPr wrap="square" lIns="0" tIns="0" rIns="0" bIns="0" rtlCol="0" anchor="ctr"/>
           <a:lstStyle/>
           <a:p>
-            <a:pPr indent="0" marL="0">
+            <a:pPr marL="0" indent="0">
               <a:buNone/>
             </a:pPr>
             <a:r>
@@ -7987,6 +7569,7 @@
         <a:solidFill>
           <a:srgbClr val="FFFFFF"/>
         </a:solidFill>
+        <a:effectLst/>
       </p:bgPr>
     </p:bg>
     <p:spTree>
@@ -8024,11 +7607,11 @@
           <a:bodyPr wrap="square" lIns="0" tIns="0" rIns="0" bIns="0" rtlCol="0" anchor="ctr"/>
           <a:lstStyle/>
           <a:p>
-            <a:pPr indent="0" marL="0">
-              <a:buNone/>
-            </a:pPr>
-            <a:r>
-              <a:rPr lang="en-US" sz="1200" b="1" spc="300" kern="0" dirty="0">
+            <a:pPr marL="0" indent="0">
+              <a:buNone/>
+            </a:pPr>
+            <a:r>
+              <a:rPr lang="en-US" sz="1200" b="1" kern="0" spc="300" dirty="0">
                 <a:solidFill>
                   <a:srgbClr val="0086C7"/>
                 </a:solidFill>
@@ -8044,14 +7627,14 @@
       </p:sp>
       <p:pic>
         <p:nvPicPr>
-          <p:cNvPr id="3" name="Image 0" descr="C:/Projects/OGH/build/brand/logo_color_big.png">    </p:cNvPr>
+          <p:cNvPr id="3" name="Image 0" descr="C:/Projects/OGH/build/brand/logo_color_big.png"/>
           <p:cNvPicPr>
             <a:picLocks noChangeAspect="1"/>
           </p:cNvPicPr>
           <p:nvPr/>
         </p:nvPicPr>
         <p:blipFill>
-          <a:blip r:embed="rId1"/>
+          <a:blip r:embed="rId3"/>
           <a:stretch>
             <a:fillRect/>
           </a:stretch>
@@ -8087,7 +7670,7 @@
           <a:bodyPr wrap="square" lIns="0" tIns="0" rIns="0" bIns="0" rtlCol="0" anchor="t"/>
           <a:lstStyle/>
           <a:p>
-            <a:pPr indent="0" marL="0">
+            <a:pPr marL="0" indent="0">
               <a:buNone/>
             </a:pPr>
             <a:r>
@@ -8126,7 +7709,7 @@
           <a:bodyPr wrap="square" lIns="0" tIns="0" rIns="0" bIns="0" rtlCol="0" anchor="ctr"/>
           <a:lstStyle/>
           <a:p>
-            <a:pPr indent="0" marL="0">
+            <a:pPr marL="0" indent="0">
               <a:buNone/>
             </a:pPr>
             <a:r>
@@ -8165,7 +7748,7 @@
           <a:bodyPr wrap="square" lIns="0" tIns="0" rIns="0" bIns="0" rtlCol="0" anchor="ctr"/>
           <a:lstStyle/>
           <a:p>
-            <a:pPr algn="r" indent="0" marL="0">
+            <a:pPr marL="0" indent="0" algn="r">
               <a:buNone/>
             </a:pPr>
             <a:r>
@@ -8231,7 +7814,7 @@
           <a:bodyPr wrap="square" lIns="0" tIns="0" rIns="0" bIns="0" rtlCol="0" anchor="ctr"/>
           <a:lstStyle/>
           <a:p>
-            <a:pPr indent="0" marL="0">
+            <a:pPr marL="0" indent="0">
               <a:buNone/>
             </a:pPr>
             <a:r>
@@ -8270,7 +7853,7 @@
           <a:bodyPr wrap="square" lIns="0" tIns="0" rIns="0" bIns="0" rtlCol="0" anchor="t"/>
           <a:lstStyle/>
           <a:p>
-            <a:pPr indent="0" marL="0">
+            <a:pPr marL="0" indent="0">
               <a:buNone/>
             </a:pPr>
             <a:r>
@@ -8336,7 +7919,7 @@
           <a:bodyPr wrap="square" lIns="0" tIns="0" rIns="0" bIns="0" rtlCol="0" anchor="ctr"/>
           <a:lstStyle/>
           <a:p>
-            <a:pPr indent="0" marL="0">
+            <a:pPr marL="0" indent="0">
               <a:buNone/>
             </a:pPr>
             <a:r>
@@ -8375,7 +7958,7 @@
           <a:bodyPr wrap="square" lIns="0" tIns="0" rIns="0" bIns="0" rtlCol="0" anchor="t"/>
           <a:lstStyle/>
           <a:p>
-            <a:pPr indent="0" marL="0">
+            <a:pPr marL="0" indent="0">
               <a:buNone/>
             </a:pPr>
             <a:r>
@@ -8441,7 +8024,7 @@
           <a:bodyPr wrap="square" lIns="0" tIns="0" rIns="0" bIns="0" rtlCol="0" anchor="ctr"/>
           <a:lstStyle/>
           <a:p>
-            <a:pPr indent="0" marL="0">
+            <a:pPr marL="0" indent="0">
               <a:buNone/>
             </a:pPr>
             <a:r>
@@ -8480,7 +8063,7 @@
           <a:bodyPr wrap="square" lIns="0" tIns="0" rIns="0" bIns="0" rtlCol="0" anchor="t"/>
           <a:lstStyle/>
           <a:p>
-            <a:pPr indent="0" marL="0">
+            <a:pPr marL="0" indent="0">
               <a:buNone/>
             </a:pPr>
             <a:r>
@@ -8546,7 +8129,7 @@
           <a:bodyPr wrap="square" lIns="0" tIns="0" rIns="0" bIns="0" rtlCol="0" anchor="ctr"/>
           <a:lstStyle/>
           <a:p>
-            <a:pPr indent="0" marL="0">
+            <a:pPr marL="0" indent="0">
               <a:buNone/>
             </a:pPr>
             <a:r>
@@ -8585,7 +8168,7 @@
           <a:bodyPr wrap="square" lIns="0" tIns="0" rIns="0" bIns="0" rtlCol="0" anchor="t"/>
           <a:lstStyle/>
           <a:p>
-            <a:pPr indent="0" marL="0">
+            <a:pPr marL="0" indent="0">
               <a:buNone/>
             </a:pPr>
             <a:r>
@@ -8651,7 +8234,7 @@
           <a:bodyPr wrap="square" lIns="0" tIns="0" rIns="0" bIns="0" rtlCol="0" anchor="ctr"/>
           <a:lstStyle/>
           <a:p>
-            <a:pPr indent="0" marL="0">
+            <a:pPr marL="0" indent="0">
               <a:buNone/>
             </a:pPr>
             <a:r>
@@ -8690,7 +8273,7 @@
           <a:bodyPr wrap="square" lIns="0" tIns="0" rIns="0" bIns="0" rtlCol="0" anchor="t"/>
           <a:lstStyle/>
           <a:p>
-            <a:pPr indent="0" marL="0">
+            <a:pPr marL="0" indent="0">
               <a:buNone/>
             </a:pPr>
             <a:r>
@@ -8756,7 +8339,7 @@
           <a:bodyPr wrap="square" lIns="0" tIns="0" rIns="0" bIns="0" rtlCol="0" anchor="ctr"/>
           <a:lstStyle/>
           <a:p>
-            <a:pPr indent="0" marL="0">
+            <a:pPr marL="0" indent="0">
               <a:buNone/>
             </a:pPr>
             <a:r>
@@ -8795,7 +8378,7 @@
           <a:bodyPr wrap="square" lIns="0" tIns="0" rIns="0" bIns="0" rtlCol="0" anchor="t"/>
           <a:lstStyle/>
           <a:p>
-            <a:pPr indent="0" marL="0">
+            <a:pPr marL="0" indent="0">
               <a:buNone/>
             </a:pPr>
             <a:r>
@@ -8834,7 +8417,7 @@
           <a:bodyPr wrap="square" lIns="0" tIns="0" rIns="0" bIns="0" rtlCol="0" anchor="t"/>
           <a:lstStyle/>
           <a:p>
-            <a:pPr indent="0" marL="0">
+            <a:pPr marL="0" indent="0">
               <a:buNone/>
             </a:pPr>
             <a:r>
@@ -8868,6 +8451,7 @@
         <a:solidFill>
           <a:srgbClr val="FFFFFF"/>
         </a:solidFill>
+        <a:effectLst/>
       </p:bgPr>
     </p:bg>
     <p:spTree>
@@ -8905,11 +8489,11 @@
           <a:bodyPr wrap="square" lIns="0" tIns="0" rIns="0" bIns="0" rtlCol="0" anchor="ctr"/>
           <a:lstStyle/>
           <a:p>
-            <a:pPr indent="0" marL="0">
-              <a:buNone/>
-            </a:pPr>
-            <a:r>
-              <a:rPr lang="en-US" sz="1200" b="1" spc="300" kern="0" dirty="0">
+            <a:pPr marL="0" indent="0">
+              <a:buNone/>
+            </a:pPr>
+            <a:r>
+              <a:rPr lang="en-US" sz="1200" b="1" kern="0" spc="300" dirty="0">
                 <a:solidFill>
                   <a:srgbClr val="0086C7"/>
                 </a:solidFill>
@@ -8925,14 +8509,14 @@
       </p:sp>
       <p:pic>
         <p:nvPicPr>
-          <p:cNvPr id="3" name="Image 0" descr="C:/Projects/OGH/build/brand/logo_color_big.png">    </p:cNvPr>
+          <p:cNvPr id="3" name="Image 0" descr="C:/Projects/OGH/build/brand/logo_color_big.png"/>
           <p:cNvPicPr>
             <a:picLocks noChangeAspect="1"/>
           </p:cNvPicPr>
           <p:nvPr/>
         </p:nvPicPr>
         <p:blipFill>
-          <a:blip r:embed="rId1"/>
+          <a:blip r:embed="rId3"/>
           <a:stretch>
             <a:fillRect/>
           </a:stretch>
@@ -8968,7 +8552,7 @@
           <a:bodyPr wrap="square" lIns="0" tIns="0" rIns="0" bIns="0" rtlCol="0" anchor="t"/>
           <a:lstStyle/>
           <a:p>
-            <a:pPr indent="0" marL="0">
+            <a:pPr marL="0" indent="0">
               <a:buNone/>
             </a:pPr>
             <a:r>
@@ -9007,7 +8591,7 @@
           <a:bodyPr wrap="square" lIns="0" tIns="0" rIns="0" bIns="0" rtlCol="0" anchor="ctr"/>
           <a:lstStyle/>
           <a:p>
-            <a:pPr indent="0" marL="0">
+            <a:pPr marL="0" indent="0">
               <a:buNone/>
             </a:pPr>
             <a:r>
@@ -9046,7 +8630,7 @@
           <a:bodyPr wrap="square" lIns="0" tIns="0" rIns="0" bIns="0" rtlCol="0" anchor="ctr"/>
           <a:lstStyle/>
           <a:p>
-            <a:pPr algn="r" indent="0" marL="0">
+            <a:pPr marL="0" indent="0" algn="r">
               <a:buNone/>
             </a:pPr>
             <a:r>
@@ -9118,14 +8702,14 @@
       </p:sp>
       <p:pic>
         <p:nvPicPr>
-          <p:cNvPr id="9" name="Image 1" descr="preencoded.png">    </p:cNvPr>
+          <p:cNvPr id="9" name="Image 1" descr="preencoded.png"/>
           <p:cNvPicPr>
             <a:picLocks noChangeAspect="1"/>
           </p:cNvPicPr>
           <p:nvPr/>
         </p:nvPicPr>
         <p:blipFill>
-          <a:blip r:embed="rId2"/>
+          <a:blip r:embed="rId4"/>
           <a:stretch>
             <a:fillRect/>
           </a:stretch>
@@ -9161,7 +8745,7 @@
           <a:bodyPr wrap="square" lIns="0" tIns="0" rIns="0" bIns="0" rtlCol="0" anchor="ctr"/>
           <a:lstStyle/>
           <a:p>
-            <a:pPr indent="0" marL="0">
+            <a:pPr marL="0" indent="0">
               <a:buNone/>
             </a:pPr>
             <a:r>
@@ -9200,7 +8784,7 @@
           <a:bodyPr wrap="square" lIns="0" tIns="0" rIns="0" bIns="0" rtlCol="0" anchor="t"/>
           <a:lstStyle/>
           <a:p>
-            <a:pPr indent="0" marL="0">
+            <a:pPr marL="0" indent="0">
               <a:buNone/>
             </a:pPr>
             <a:r>
@@ -9272,14 +8856,14 @@
       </p:sp>
       <p:pic>
         <p:nvPicPr>
-          <p:cNvPr id="14" name="Image 2" descr="preencoded.png">    </p:cNvPr>
+          <p:cNvPr id="14" name="Image 2" descr="preencoded.png"/>
           <p:cNvPicPr>
             <a:picLocks noChangeAspect="1"/>
           </p:cNvPicPr>
           <p:nvPr/>
         </p:nvPicPr>
         <p:blipFill>
-          <a:blip r:embed="rId3"/>
+          <a:blip r:embed="rId5"/>
           <a:stretch>
             <a:fillRect/>
           </a:stretch>
@@ -9315,7 +8899,7 @@
           <a:bodyPr wrap="square" lIns="0" tIns="0" rIns="0" bIns="0" rtlCol="0" anchor="ctr"/>
           <a:lstStyle/>
           <a:p>
-            <a:pPr indent="0" marL="0">
+            <a:pPr marL="0" indent="0">
               <a:buNone/>
             </a:pPr>
             <a:r>
@@ -9354,7 +8938,7 @@
           <a:bodyPr wrap="square" lIns="0" tIns="0" rIns="0" bIns="0" rtlCol="0" anchor="t"/>
           <a:lstStyle/>
           <a:p>
-            <a:pPr indent="0" marL="0">
+            <a:pPr marL="0" indent="0">
               <a:buNone/>
             </a:pPr>
             <a:r>
@@ -9426,14 +9010,14 @@
       </p:sp>
       <p:pic>
         <p:nvPicPr>
-          <p:cNvPr id="19" name="Image 3" descr="preencoded.png">    </p:cNvPr>
+          <p:cNvPr id="19" name="Image 3" descr="preencoded.png"/>
           <p:cNvPicPr>
             <a:picLocks noChangeAspect="1"/>
           </p:cNvPicPr>
           <p:nvPr/>
         </p:nvPicPr>
         <p:blipFill>
-          <a:blip r:embed="rId4"/>
+          <a:blip r:embed="rId6"/>
           <a:stretch>
             <a:fillRect/>
           </a:stretch>
@@ -9469,7 +9053,7 @@
           <a:bodyPr wrap="square" lIns="0" tIns="0" rIns="0" bIns="0" rtlCol="0" anchor="ctr"/>
           <a:lstStyle/>
           <a:p>
-            <a:pPr indent="0" marL="0">
+            <a:pPr marL="0" indent="0">
               <a:buNone/>
             </a:pPr>
             <a:r>
@@ -9508,7 +9092,7 @@
           <a:bodyPr wrap="square" lIns="0" tIns="0" rIns="0" bIns="0" rtlCol="0" anchor="t"/>
           <a:lstStyle/>
           <a:p>
-            <a:pPr indent="0" marL="0">
+            <a:pPr marL="0" indent="0">
               <a:buNone/>
             </a:pPr>
             <a:r>
@@ -9580,14 +9164,14 @@
       </p:sp>
       <p:pic>
         <p:nvPicPr>
-          <p:cNvPr id="24" name="Image 4" descr="preencoded.png">    </p:cNvPr>
+          <p:cNvPr id="24" name="Image 4" descr="preencoded.png"/>
           <p:cNvPicPr>
             <a:picLocks noChangeAspect="1"/>
           </p:cNvPicPr>
           <p:nvPr/>
         </p:nvPicPr>
         <p:blipFill>
-          <a:blip r:embed="rId5"/>
+          <a:blip r:embed="rId7"/>
           <a:stretch>
             <a:fillRect/>
           </a:stretch>
@@ -9623,7 +9207,7 @@
           <a:bodyPr wrap="square" lIns="0" tIns="0" rIns="0" bIns="0" rtlCol="0" anchor="ctr"/>
           <a:lstStyle/>
           <a:p>
-            <a:pPr indent="0" marL="0">
+            <a:pPr marL="0" indent="0">
               <a:buNone/>
             </a:pPr>
             <a:r>
@@ -9662,7 +9246,7 @@
           <a:bodyPr wrap="square" lIns="0" tIns="0" rIns="0" bIns="0" rtlCol="0" anchor="t"/>
           <a:lstStyle/>
           <a:p>
-            <a:pPr indent="0" marL="0">
+            <a:pPr marL="0" indent="0">
               <a:buNone/>
             </a:pPr>
             <a:r>
@@ -9734,14 +9318,14 @@
       </p:sp>
       <p:pic>
         <p:nvPicPr>
-          <p:cNvPr id="29" name="Image 5" descr="preencoded.png">    </p:cNvPr>
+          <p:cNvPr id="29" name="Image 5" descr="preencoded.png"/>
           <p:cNvPicPr>
             <a:picLocks noChangeAspect="1"/>
           </p:cNvPicPr>
           <p:nvPr/>
         </p:nvPicPr>
         <p:blipFill>
-          <a:blip r:embed="rId6"/>
+          <a:blip r:embed="rId8"/>
           <a:stretch>
             <a:fillRect/>
           </a:stretch>
@@ -9777,7 +9361,7 @@
           <a:bodyPr wrap="square" lIns="0" tIns="0" rIns="0" bIns="0" rtlCol="0" anchor="ctr"/>
           <a:lstStyle/>
           <a:p>
-            <a:pPr indent="0" marL="0">
+            <a:pPr marL="0" indent="0">
               <a:buNone/>
             </a:pPr>
             <a:r>
@@ -9816,7 +9400,7 @@
           <a:bodyPr wrap="square" lIns="0" tIns="0" rIns="0" bIns="0" rtlCol="0" anchor="t"/>
           <a:lstStyle/>
           <a:p>
-            <a:pPr indent="0" marL="0">
+            <a:pPr marL="0" indent="0">
               <a:buNone/>
             </a:pPr>
             <a:r>
@@ -9888,14 +9472,14 @@
       </p:sp>
       <p:pic>
         <p:nvPicPr>
-          <p:cNvPr id="34" name="Image 6" descr="preencoded.png">    </p:cNvPr>
+          <p:cNvPr id="34" name="Image 6" descr="preencoded.png"/>
           <p:cNvPicPr>
             <a:picLocks noChangeAspect="1"/>
           </p:cNvPicPr>
           <p:nvPr/>
         </p:nvPicPr>
         <p:blipFill>
-          <a:blip r:embed="rId7"/>
+          <a:blip r:embed="rId9"/>
           <a:stretch>
             <a:fillRect/>
           </a:stretch>
@@ -9931,7 +9515,7 @@
           <a:bodyPr wrap="square" lIns="0" tIns="0" rIns="0" bIns="0" rtlCol="0" anchor="ctr"/>
           <a:lstStyle/>
           <a:p>
-            <a:pPr indent="0" marL="0">
+            <a:pPr marL="0" indent="0">
               <a:buNone/>
             </a:pPr>
             <a:r>
@@ -9970,7 +9554,7 @@
           <a:bodyPr wrap="square" lIns="0" tIns="0" rIns="0" bIns="0" rtlCol="0" anchor="t"/>
           <a:lstStyle/>
           <a:p>
-            <a:pPr indent="0" marL="0">
+            <a:pPr marL="0" indent="0">
               <a:buNone/>
             </a:pPr>
             <a:r>
@@ -10009,7 +9593,7 @@
           <a:bodyPr wrap="square" lIns="0" tIns="0" rIns="0" bIns="0" rtlCol="0" anchor="ctr"/>
           <a:lstStyle/>
           <a:p>
-            <a:pPr indent="0" marL="0">
+            <a:pPr marL="0" indent="0">
               <a:buNone/>
             </a:pPr>
             <a:r>
@@ -10043,6 +9627,7 @@
         <a:solidFill>
           <a:srgbClr val="FFFFFF"/>
         </a:solidFill>
+        <a:effectLst/>
       </p:bgPr>
     </p:bg>
     <p:spTree>
@@ -10080,11 +9665,11 @@
           <a:bodyPr wrap="square" lIns="0" tIns="0" rIns="0" bIns="0" rtlCol="0" anchor="ctr"/>
           <a:lstStyle/>
           <a:p>
-            <a:pPr indent="0" marL="0">
-              <a:buNone/>
-            </a:pPr>
-            <a:r>
-              <a:rPr lang="en-US" sz="1200" b="1" spc="300" kern="0" dirty="0">
+            <a:pPr marL="0" indent="0">
+              <a:buNone/>
+            </a:pPr>
+            <a:r>
+              <a:rPr lang="en-US" sz="1200" b="1" kern="0" spc="300" dirty="0">
                 <a:solidFill>
                   <a:srgbClr val="0086C7"/>
                 </a:solidFill>
@@ -10100,14 +9685,14 @@
       </p:sp>
       <p:pic>
         <p:nvPicPr>
-          <p:cNvPr id="3" name="Image 0" descr="C:/Projects/OGH/build/brand/logo_color_big.png">    </p:cNvPr>
+          <p:cNvPr id="3" name="Image 0" descr="C:/Projects/OGH/build/brand/logo_color_big.png"/>
           <p:cNvPicPr>
             <a:picLocks noChangeAspect="1"/>
           </p:cNvPicPr>
           <p:nvPr/>
         </p:nvPicPr>
         <p:blipFill>
-          <a:blip r:embed="rId1"/>
+          <a:blip r:embed="rId3"/>
           <a:stretch>
             <a:fillRect/>
           </a:stretch>
@@ -10143,7 +9728,7 @@
           <a:bodyPr wrap="square" lIns="0" tIns="0" rIns="0" bIns="0" rtlCol="0" anchor="t"/>
           <a:lstStyle/>
           <a:p>
-            <a:pPr indent="0" marL="0">
+            <a:pPr marL="0" indent="0">
               <a:buNone/>
             </a:pPr>
             <a:r>
@@ -10182,7 +9767,7 @@
           <a:bodyPr wrap="square" lIns="0" tIns="0" rIns="0" bIns="0" rtlCol="0" anchor="ctr"/>
           <a:lstStyle/>
           <a:p>
-            <a:pPr indent="0" marL="0">
+            <a:pPr marL="0" indent="0">
               <a:buNone/>
             </a:pPr>
             <a:r>
@@ -10221,7 +9806,7 @@
           <a:bodyPr wrap="square" lIns="0" tIns="0" rIns="0" bIns="0" rtlCol="0" anchor="ctr"/>
           <a:lstStyle/>
           <a:p>
-            <a:pPr algn="r" indent="0" marL="0">
+            <a:pPr marL="0" indent="0" algn="r">
               <a:buNone/>
             </a:pPr>
             <a:r>
@@ -10263,7 +9848,7 @@
             <a:prstDash val="solid"/>
           </a:ln>
           <a:effectLst>
-            <a:outerShdw sx="100000" sy="100000" kx="0" ky="0" algn="bl" rotWithShape="0" blurRad="76200" dist="25400" dir="5400000">
+            <a:outerShdw blurRad="76200" dist="25400" dir="5400000" algn="bl" rotWithShape="0">
               <a:srgbClr val="000000">
                 <a:alpha val="15000"/>
               </a:srgbClr>
@@ -10273,14 +9858,14 @@
       </p:sp>
       <p:pic>
         <p:nvPicPr>
-          <p:cNvPr id="8" name="Image 1" descr="C:/Projects/OGH/evidence/screenshots/03_desktop_product_page_sheep_blanket.jpg">    </p:cNvPr>
+          <p:cNvPr id="8" name="Image 1" descr="C:/Projects/OGH/evidence/screenshots/03_desktop_product_page_sheep_blanket.jpg"/>
           <p:cNvPicPr>
             <a:picLocks noChangeAspect="1"/>
           </p:cNvPicPr>
           <p:nvPr/>
         </p:nvPicPr>
         <p:blipFill>
-          <a:blip r:embed="rId2"/>
+          <a:blip r:embed="rId4"/>
           <a:stretch>
             <a:fillRect/>
           </a:stretch>
@@ -10316,7 +9901,7 @@
           <a:bodyPr wrap="square" lIns="0" tIns="0" rIns="0" bIns="0" rtlCol="0" anchor="ctr"/>
           <a:lstStyle/>
           <a:p>
-            <a:pPr algn="ctr" indent="0" marL="0">
+            <a:pPr marL="0" indent="0" algn="ctr">
               <a:buNone/>
             </a:pPr>
             <a:r>
@@ -10358,7 +9943,7 @@
             <a:prstDash val="solid"/>
           </a:ln>
           <a:effectLst>
-            <a:outerShdw sx="100000" sy="100000" kx="0" ky="0" algn="bl" rotWithShape="0" blurRad="76200" dist="25400" dir="5400000">
+            <a:outerShdw blurRad="76200" dist="25400" dir="5400000" algn="bl" rotWithShape="0">
               <a:srgbClr val="000000">
                 <a:alpha val="15000"/>
               </a:srgbClr>
@@ -10368,14 +9953,14 @@
       </p:sp>
       <p:pic>
         <p:nvPicPr>
-          <p:cNvPr id="11" name="Image 2" descr="C:/Projects/OGH/evidence/screenshots/19_tablet_768_about_us.jpg">    </p:cNvPr>
+          <p:cNvPr id="11" name="Image 2" descr="C:/Projects/OGH/evidence/screenshots/19_tablet_768_about_us.jpg"/>
           <p:cNvPicPr>
             <a:picLocks noChangeAspect="1"/>
           </p:cNvPicPr>
           <p:nvPr/>
         </p:nvPicPr>
         <p:blipFill>
-          <a:blip r:embed="rId3"/>
+          <a:blip r:embed="rId5"/>
           <a:stretch>
             <a:fillRect/>
           </a:stretch>
@@ -10411,7 +9996,7 @@
           <a:bodyPr wrap="square" lIns="0" tIns="0" rIns="0" bIns="0" rtlCol="0" anchor="ctr"/>
           <a:lstStyle/>
           <a:p>
-            <a:pPr algn="ctr" indent="0" marL="0">
+            <a:pPr marL="0" indent="0" algn="ctr">
               <a:buNone/>
             </a:pPr>
             <a:r>
@@ -10453,7 +10038,7 @@
             <a:prstDash val="solid"/>
           </a:ln>
           <a:effectLst>
-            <a:outerShdw sx="100000" sy="100000" kx="0" ky="0" algn="bl" rotWithShape="0" blurRad="76200" dist="25400" dir="5400000">
+            <a:outerShdw blurRad="76200" dist="25400" dir="5400000" algn="bl" rotWithShape="0">
               <a:srgbClr val="000000">
                 <a:alpha val="15000"/>
               </a:srgbClr>
@@ -10463,14 +10048,14 @@
       </p:sp>
       <p:pic>
         <p:nvPicPr>
-          <p:cNvPr id="14" name="Image 3" descr="C:/Projects/OGH/evidence/screenshots/11_mobile_homepage_375.jpg">    </p:cNvPr>
+          <p:cNvPr id="14" name="Image 3" descr="C:/Projects/OGH/evidence/screenshots/11_mobile_homepage_375.jpg"/>
           <p:cNvPicPr>
             <a:picLocks noChangeAspect="1"/>
           </p:cNvPicPr>
           <p:nvPr/>
         </p:nvPicPr>
         <p:blipFill>
-          <a:blip r:embed="rId4"/>
+          <a:blip r:embed="rId6"/>
           <a:stretch>
             <a:fillRect/>
           </a:stretch>
@@ -10509,7 +10094,7 @@
             <a:prstDash val="solid"/>
           </a:ln>
           <a:effectLst>
-            <a:outerShdw sx="100000" sy="100000" kx="0" ky="0" algn="bl" rotWithShape="0" blurRad="76200" dist="25400" dir="5400000">
+            <a:outerShdw blurRad="76200" dist="25400" dir="5400000" algn="bl" rotWithShape="0">
               <a:srgbClr val="000000">
                 <a:alpha val="15000"/>
               </a:srgbClr>
@@ -10519,14 +10104,14 @@
       </p:sp>
       <p:pic>
         <p:nvPicPr>
-          <p:cNvPr id="16" name="Image 4" descr="C:/Projects/OGH/evidence/screenshots/12_mobile_menu_open.jpg">    </p:cNvPr>
+          <p:cNvPr id="16" name="Image 4" descr="C:/Projects/OGH/evidence/screenshots/12_mobile_menu_open.jpg"/>
           <p:cNvPicPr>
             <a:picLocks noChangeAspect="1"/>
           </p:cNvPicPr>
           <p:nvPr/>
         </p:nvPicPr>
         <p:blipFill>
-          <a:blip r:embed="rId5"/>
+          <a:blip r:embed="rId7"/>
           <a:stretch>
             <a:fillRect/>
           </a:stretch>
@@ -10562,7 +10147,7 @@
           <a:bodyPr wrap="square" lIns="0" tIns="0" rIns="0" bIns="0" rtlCol="0" anchor="ctr"/>
           <a:lstStyle/>
           <a:p>
-            <a:pPr algn="ctr" indent="0" marL="0">
+            <a:pPr marL="0" indent="0" algn="ctr">
               <a:buNone/>
             </a:pPr>
             <a:r>
@@ -10577,72 +10162,6 @@
               <a:t>Mobile</a:t>
             </a:r>
             <a:endParaRPr lang="en-US" sz="1400" dirty="0"/>
-          </a:p>
-        </p:txBody>
-      </p:sp>
-      <p:sp>
-        <p:nvSpPr>
-          <p:cNvPr id="18" name="Shape 11"/>
-          <p:cNvSpPr/>
-          <p:nvPr/>
-        </p:nvSpPr>
-        <p:spPr>
-          <a:xfrm>
-            <a:off x="10058400" y="1645920"/>
-            <a:ext cx="1554480" cy="2377440"/>
-          </a:xfrm>
-          <a:prstGeom prst="roundRect">
-            <a:avLst>
-              <a:gd name="adj" fmla="val 7059"/>
-            </a:avLst>
-          </a:prstGeom>
-          <a:solidFill>
-            <a:srgbClr val="E3F1FA"/>
-          </a:solidFill>
-          <a:ln w="12700">
-            <a:solidFill>
-              <a:srgbClr val="E3F1FA"/>
-            </a:solidFill>
-            <a:prstDash val="solid"/>
-          </a:ln>
-        </p:spPr>
-      </p:sp>
-      <p:sp>
-        <p:nvSpPr>
-          <p:cNvPr id="19" name="Text 12"/>
-          <p:cNvSpPr txBox="1"/>
-          <p:nvPr/>
-        </p:nvSpPr>
-        <p:spPr>
-          <a:xfrm>
-            <a:off x="10168128" y="1783080"/>
-            <a:ext cx="1335024" cy="2103120"/>
-          </a:xfrm>
-          <a:prstGeom prst="rect">
-            <a:avLst/>
-          </a:prstGeom>
-          <a:noFill/>
-          <a:ln/>
-        </p:spPr>
-        <p:txBody>
-          <a:bodyPr wrap="square" lIns="0" tIns="0" rIns="0" bIns="0" rtlCol="0" anchor="t"/>
-          <a:lstStyle/>
-          <a:p>
-            <a:pPr indent="0" marL="0">
-              <a:buNone/>
-            </a:pPr>
-            <a:r>
-              <a:rPr lang="en-US" sz="1100" dirty="0">
-                <a:solidFill>
-                  <a:srgbClr val="0B1929"/>
-                </a:solidFill>
-                <a:latin typeface="Calibri" pitchFamily="34" charset="0"/>
-                <a:ea typeface="Calibri" pitchFamily="34" charset="-122"/>
-                <a:cs typeface="Calibri" pitchFamily="34" charset="-120"/>
-              </a:rPr>
-              <a:t>Tested in a Chrome-based browser. Other browsers are recommended for next month.</a:t>
-            </a:r>
-            <a:endParaRPr lang="en-US" sz="1100" dirty="0"/>
           </a:p>
         </p:txBody>
       </p:sp>
@@ -10768,6 +10287,7 @@
         <a:solidFill>
           <a:srgbClr val="FFFFFF"/>
         </a:solidFill>
+        <a:effectLst/>
       </p:bgPr>
     </p:bg>
     <p:spTree>
@@ -10805,11 +10325,11 @@
           <a:bodyPr wrap="square" lIns="0" tIns="0" rIns="0" bIns="0" rtlCol="0" anchor="ctr"/>
           <a:lstStyle/>
           <a:p>
-            <a:pPr indent="0" marL="0">
-              <a:buNone/>
-            </a:pPr>
-            <a:r>
-              <a:rPr lang="en-US" sz="1200" b="1" spc="300" kern="0" dirty="0">
+            <a:pPr marL="0" indent="0">
+              <a:buNone/>
+            </a:pPr>
+            <a:r>
+              <a:rPr lang="en-US" sz="1200" b="1" kern="0" spc="300" dirty="0">
                 <a:solidFill>
                   <a:srgbClr val="0086C7"/>
                 </a:solidFill>
@@ -10825,14 +10345,14 @@
       </p:sp>
       <p:pic>
         <p:nvPicPr>
-          <p:cNvPr id="3" name="Image 0" descr="C:/Projects/OGH/build/brand/logo_color_big.png">    </p:cNvPr>
+          <p:cNvPr id="3" name="Image 0" descr="C:/Projects/OGH/build/brand/logo_color_big.png"/>
           <p:cNvPicPr>
             <a:picLocks noChangeAspect="1"/>
           </p:cNvPicPr>
           <p:nvPr/>
         </p:nvPicPr>
         <p:blipFill>
-          <a:blip r:embed="rId1"/>
+          <a:blip r:embed="rId3"/>
           <a:stretch>
             <a:fillRect/>
           </a:stretch>
@@ -10868,7 +10388,7 @@
           <a:bodyPr wrap="square" lIns="0" tIns="0" rIns="0" bIns="0" rtlCol="0" anchor="t"/>
           <a:lstStyle/>
           <a:p>
-            <a:pPr indent="0" marL="0">
+            <a:pPr marL="0" indent="0">
               <a:buNone/>
             </a:pPr>
             <a:r>
@@ -10907,7 +10427,7 @@
           <a:bodyPr wrap="square" lIns="0" tIns="0" rIns="0" bIns="0" rtlCol="0" anchor="ctr"/>
           <a:lstStyle/>
           <a:p>
-            <a:pPr indent="0" marL="0">
+            <a:pPr marL="0" indent="0">
               <a:buNone/>
             </a:pPr>
             <a:r>
@@ -10946,7 +10466,7 @@
           <a:bodyPr wrap="square" lIns="0" tIns="0" rIns="0" bIns="0" rtlCol="0" anchor="ctr"/>
           <a:lstStyle/>
           <a:p>
-            <a:pPr algn="r" indent="0" marL="0">
+            <a:pPr marL="0" indent="0" algn="r">
               <a:buNone/>
             </a:pPr>
             <a:r>
@@ -11018,14 +10538,14 @@
       </p:sp>
       <p:pic>
         <p:nvPicPr>
-          <p:cNvPr id="9" name="Image 1" descr="preencoded.png">    </p:cNvPr>
+          <p:cNvPr id="9" name="Image 1" descr="preencoded.png"/>
           <p:cNvPicPr>
             <a:picLocks noChangeAspect="1"/>
           </p:cNvPicPr>
           <p:nvPr/>
         </p:nvPicPr>
         <p:blipFill>
-          <a:blip r:embed="rId2"/>
+          <a:blip r:embed="rId4"/>
           <a:stretch>
             <a:fillRect/>
           </a:stretch>
@@ -11061,7 +10581,7 @@
           <a:bodyPr wrap="square" lIns="0" tIns="0" rIns="0" bIns="0" rtlCol="0" anchor="ctr"/>
           <a:lstStyle/>
           <a:p>
-            <a:pPr indent="0" marL="0">
+            <a:pPr marL="0" indent="0">
               <a:buNone/>
             </a:pPr>
             <a:r>
@@ -11100,7 +10620,7 @@
           <a:bodyPr wrap="square" lIns="0" tIns="0" rIns="0" bIns="0" rtlCol="0" anchor="t"/>
           <a:lstStyle/>
           <a:p>
-            <a:pPr indent="0" marL="0">
+            <a:pPr marL="0" indent="0">
               <a:buNone/>
             </a:pPr>
             <a:r>
@@ -11172,14 +10692,14 @@
       </p:sp>
       <p:pic>
         <p:nvPicPr>
-          <p:cNvPr id="14" name="Image 2" descr="preencoded.png">    </p:cNvPr>
+          <p:cNvPr id="14" name="Image 2" descr="preencoded.png"/>
           <p:cNvPicPr>
             <a:picLocks noChangeAspect="1"/>
           </p:cNvPicPr>
           <p:nvPr/>
         </p:nvPicPr>
         <p:blipFill>
-          <a:blip r:embed="rId3"/>
+          <a:blip r:embed="rId5"/>
           <a:stretch>
             <a:fillRect/>
           </a:stretch>
@@ -11215,7 +10735,7 @@
           <a:bodyPr wrap="square" lIns="0" tIns="0" rIns="0" bIns="0" rtlCol="0" anchor="ctr"/>
           <a:lstStyle/>
           <a:p>
-            <a:pPr indent="0" marL="0">
+            <a:pPr marL="0" indent="0">
               <a:buNone/>
             </a:pPr>
             <a:r>
@@ -11254,7 +10774,7 @@
           <a:bodyPr wrap="square" lIns="0" tIns="0" rIns="0" bIns="0" rtlCol="0" anchor="t"/>
           <a:lstStyle/>
           <a:p>
-            <a:pPr indent="0" marL="0">
+            <a:pPr marL="0" indent="0">
               <a:buNone/>
             </a:pPr>
             <a:r>
@@ -11326,14 +10846,14 @@
       </p:sp>
       <p:pic>
         <p:nvPicPr>
-          <p:cNvPr id="19" name="Image 3" descr="preencoded.png">    </p:cNvPr>
+          <p:cNvPr id="19" name="Image 3" descr="preencoded.png"/>
           <p:cNvPicPr>
             <a:picLocks noChangeAspect="1"/>
           </p:cNvPicPr>
           <p:nvPr/>
         </p:nvPicPr>
         <p:blipFill>
-          <a:blip r:embed="rId4"/>
+          <a:blip r:embed="rId6"/>
           <a:stretch>
             <a:fillRect/>
           </a:stretch>
@@ -11369,7 +10889,7 @@
           <a:bodyPr wrap="square" lIns="0" tIns="0" rIns="0" bIns="0" rtlCol="0" anchor="ctr"/>
           <a:lstStyle/>
           <a:p>
-            <a:pPr indent="0" marL="0">
+            <a:pPr marL="0" indent="0">
               <a:buNone/>
             </a:pPr>
             <a:r>
@@ -11408,7 +10928,7 @@
           <a:bodyPr wrap="square" lIns="0" tIns="0" rIns="0" bIns="0" rtlCol="0" anchor="t"/>
           <a:lstStyle/>
           <a:p>
-            <a:pPr indent="0" marL="0">
+            <a:pPr marL="0" indent="0">
               <a:buNone/>
             </a:pPr>
             <a:r>
@@ -11480,14 +11000,14 @@
       </p:sp>
       <p:pic>
         <p:nvPicPr>
-          <p:cNvPr id="24" name="Image 4" descr="preencoded.png">    </p:cNvPr>
+          <p:cNvPr id="24" name="Image 4" descr="preencoded.png"/>
           <p:cNvPicPr>
             <a:picLocks noChangeAspect="1"/>
           </p:cNvPicPr>
           <p:nvPr/>
         </p:nvPicPr>
         <p:blipFill>
-          <a:blip r:embed="rId5"/>
+          <a:blip r:embed="rId7"/>
           <a:stretch>
             <a:fillRect/>
           </a:stretch>
@@ -11523,7 +11043,7 @@
           <a:bodyPr wrap="square" lIns="0" tIns="0" rIns="0" bIns="0" rtlCol="0" anchor="ctr"/>
           <a:lstStyle/>
           <a:p>
-            <a:pPr indent="0" marL="0">
+            <a:pPr marL="0" indent="0">
               <a:buNone/>
             </a:pPr>
             <a:r>
@@ -11562,7 +11082,7 @@
           <a:bodyPr wrap="square" lIns="0" tIns="0" rIns="0" bIns="0" rtlCol="0" anchor="t"/>
           <a:lstStyle/>
           <a:p>
-            <a:pPr indent="0" marL="0">
+            <a:pPr marL="0" indent="0">
               <a:buNone/>
             </a:pPr>
             <a:r>
@@ -11604,7 +11124,7 @@
             <a:prstDash val="solid"/>
           </a:ln>
           <a:effectLst>
-            <a:outerShdw sx="100000" sy="100000" kx="0" ky="0" algn="bl" rotWithShape="0" blurRad="76200" dist="25400" dir="5400000">
+            <a:outerShdw blurRad="76200" dist="25400" dir="5400000" algn="bl" rotWithShape="0">
               <a:srgbClr val="000000">
                 <a:alpha val="15000"/>
               </a:srgbClr>
@@ -11614,14 +11134,14 @@
       </p:sp>
       <p:pic>
         <p:nvPicPr>
-          <p:cNvPr id="28" name="Image 5" descr="C:/Projects/OGH/evidence/screenshots/04_desktop_add_to_cart_modal.jpg">    </p:cNvPr>
+          <p:cNvPr id="28" name="Image 5" descr="C:/Projects/OGH/evidence/screenshots/04_desktop_add_to_cart_modal.jpg"/>
           <p:cNvPicPr>
             <a:picLocks noChangeAspect="1"/>
           </p:cNvPicPr>
           <p:nvPr/>
         </p:nvPicPr>
         <p:blipFill>
-          <a:blip r:embed="rId6"/>
+          <a:blip r:embed="rId8"/>
           <a:stretch>
             <a:fillRect/>
           </a:stretch>
@@ -11660,7 +11180,7 @@
             <a:prstDash val="solid"/>
           </a:ln>
           <a:effectLst>
-            <a:outerShdw sx="100000" sy="100000" kx="0" ky="0" algn="bl" rotWithShape="0" blurRad="76200" dist="25400" dir="5400000">
+            <a:outerShdw blurRad="76200" dist="25400" dir="5400000" algn="bl" rotWithShape="0">
               <a:srgbClr val="000000">
                 <a:alpha val="15000"/>
               </a:srgbClr>
@@ -11670,14 +11190,14 @@
       </p:sp>
       <p:pic>
         <p:nvPicPr>
-          <p:cNvPr id="30" name="Image 6" descr="C:/Projects/OGH/build/brand/coupon_clean.jpg">    </p:cNvPr>
+          <p:cNvPr id="30" name="Image 6" descr="C:/Projects/OGH/build/brand/coupon_clean.jpg"/>
           <p:cNvPicPr>
             <a:picLocks noChangeAspect="1"/>
           </p:cNvPicPr>
           <p:nvPr/>
         </p:nvPicPr>
         <p:blipFill>
-          <a:blip r:embed="rId7"/>
+          <a:blip r:embed="rId9"/>
           <a:stretch>
             <a:fillRect/>
           </a:stretch>
@@ -11716,7 +11236,7 @@
             <a:prstDash val="solid"/>
           </a:ln>
           <a:effectLst>
-            <a:outerShdw sx="100000" sy="100000" kx="0" ky="0" algn="bl" rotWithShape="0" blurRad="76200" dist="25400" dir="5400000">
+            <a:outerShdw blurRad="76200" dist="25400" dir="5400000" algn="bl" rotWithShape="0">
               <a:srgbClr val="000000">
                 <a:alpha val="15000"/>
               </a:srgbClr>
@@ -11726,14 +11246,14 @@
       </p:sp>
       <p:pic>
         <p:nvPicPr>
-          <p:cNvPr id="32" name="Image 7" descr="C:/Projects/OGH/evidence/screenshots/08_desktop_checkout_guest_email_step.jpg">    </p:cNvPr>
+          <p:cNvPr id="32" name="Image 7" descr="C:/Projects/OGH/evidence/screenshots/08_desktop_checkout_guest_email_step.jpg"/>
           <p:cNvPicPr>
             <a:picLocks noChangeAspect="1"/>
           </p:cNvPicPr>
           <p:nvPr/>
         </p:nvPicPr>
         <p:blipFill>
-          <a:blip r:embed="rId8"/>
+          <a:blip r:embed="rId10"/>
           <a:stretch>
             <a:fillRect/>
           </a:stretch>
@@ -11769,7 +11289,7 @@
           <a:bodyPr wrap="square" lIns="0" tIns="0" rIns="0" bIns="0" rtlCol="0" anchor="ctr"/>
           <a:lstStyle/>
           <a:p>
-            <a:pPr algn="ctr" indent="0" marL="0">
+            <a:pPr marL="0" indent="0" algn="ctr">
               <a:buNone/>
             </a:pPr>
             <a:r>
@@ -11808,7 +11328,7 @@
           <a:bodyPr wrap="square" lIns="0" tIns="0" rIns="0" bIns="0" rtlCol="0" anchor="ctr"/>
           <a:lstStyle/>
           <a:p>
-            <a:pPr algn="ctr" indent="0" marL="0">
+            <a:pPr marL="0" indent="0" algn="ctr">
               <a:buNone/>
             </a:pPr>
             <a:r>
@@ -11847,7 +11367,7 @@
           <a:bodyPr wrap="square" lIns="0" tIns="0" rIns="0" bIns="0" rtlCol="0" anchor="ctr"/>
           <a:lstStyle/>
           <a:p>
-            <a:pPr algn="ctr" indent="0" marL="0">
+            <a:pPr marL="0" indent="0" algn="ctr">
               <a:buNone/>
             </a:pPr>
             <a:r>
@@ -11886,7 +11406,7 @@
           <a:bodyPr wrap="square" lIns="0" tIns="0" rIns="0" bIns="0" rtlCol="0" anchor="t"/>
           <a:lstStyle/>
           <a:p>
-            <a:pPr indent="0" marL="0">
+            <a:pPr marL="0" indent="0">
               <a:buNone/>
             </a:pPr>
             <a:r>
@@ -11920,6 +11440,7 @@
         <a:solidFill>
           <a:srgbClr val="FFFFFF"/>
         </a:solidFill>
+        <a:effectLst/>
       </p:bgPr>
     </p:bg>
     <p:spTree>
@@ -11957,11 +11478,11 @@
           <a:bodyPr wrap="square" lIns="0" tIns="0" rIns="0" bIns="0" rtlCol="0" anchor="ctr"/>
           <a:lstStyle/>
           <a:p>
-            <a:pPr indent="0" marL="0">
-              <a:buNone/>
-            </a:pPr>
-            <a:r>
-              <a:rPr lang="en-US" sz="1200" b="1" spc="300" kern="0" dirty="0">
+            <a:pPr marL="0" indent="0">
+              <a:buNone/>
+            </a:pPr>
+            <a:r>
+              <a:rPr lang="en-US" sz="1200" b="1" kern="0" spc="300" dirty="0">
                 <a:solidFill>
                   <a:srgbClr val="0086C7"/>
                 </a:solidFill>
@@ -11977,14 +11498,14 @@
       </p:sp>
       <p:pic>
         <p:nvPicPr>
-          <p:cNvPr id="3" name="Image 0" descr="C:/Projects/OGH/build/brand/logo_color_big.png">    </p:cNvPr>
+          <p:cNvPr id="3" name="Image 0" descr="C:/Projects/OGH/build/brand/logo_color_big.png"/>
           <p:cNvPicPr>
             <a:picLocks noChangeAspect="1"/>
           </p:cNvPicPr>
           <p:nvPr/>
         </p:nvPicPr>
         <p:blipFill>
-          <a:blip r:embed="rId1"/>
+          <a:blip r:embed="rId3"/>
           <a:stretch>
             <a:fillRect/>
           </a:stretch>
@@ -12020,7 +11541,7 @@
           <a:bodyPr wrap="square" lIns="0" tIns="0" rIns="0" bIns="0" rtlCol="0" anchor="t"/>
           <a:lstStyle/>
           <a:p>
-            <a:pPr indent="0" marL="0">
+            <a:pPr marL="0" indent="0">
               <a:buNone/>
             </a:pPr>
             <a:r>
@@ -12059,7 +11580,7 @@
           <a:bodyPr wrap="square" lIns="0" tIns="0" rIns="0" bIns="0" rtlCol="0" anchor="ctr"/>
           <a:lstStyle/>
           <a:p>
-            <a:pPr indent="0" marL="0">
+            <a:pPr marL="0" indent="0">
               <a:buNone/>
             </a:pPr>
             <a:r>
@@ -12098,7 +11619,7 @@
           <a:bodyPr wrap="square" lIns="0" tIns="0" rIns="0" bIns="0" rtlCol="0" anchor="ctr"/>
           <a:lstStyle/>
           <a:p>
-            <a:pPr algn="r" indent="0" marL="0">
+            <a:pPr marL="0" indent="0" algn="r">
               <a:buNone/>
             </a:pPr>
             <a:r>
@@ -12137,7 +11658,7 @@
           <a:bodyPr wrap="square" lIns="0" tIns="0" rIns="0" bIns="0" rtlCol="0" anchor="ctr"/>
           <a:lstStyle/>
           <a:p>
-            <a:pPr indent="0" marL="0">
+            <a:pPr marL="0" indent="0">
               <a:buNone/>
             </a:pPr>
             <a:r>
@@ -12176,7 +11697,7 @@
           <a:bodyPr wrap="square" lIns="0" tIns="0" rIns="0" bIns="0" rtlCol="0" anchor="ctr"/>
           <a:lstStyle/>
           <a:p>
-            <a:pPr indent="0" marL="0">
+            <a:pPr marL="0" indent="0">
               <a:buNone/>
             </a:pPr>
             <a:r>
@@ -12242,7 +11763,7 @@
           <a:bodyPr wrap="square" lIns="0" tIns="0" rIns="0" bIns="0" rtlCol="0" anchor="ctr"/>
           <a:lstStyle/>
           <a:p>
-            <a:pPr indent="0" marL="0">
+            <a:pPr marL="0" indent="0">
               <a:buNone/>
             </a:pPr>
             <a:r>
@@ -12281,7 +11802,7 @@
           <a:bodyPr wrap="square" lIns="0" tIns="0" rIns="0" bIns="0" rtlCol="0" anchor="ctr"/>
           <a:lstStyle/>
           <a:p>
-            <a:pPr indent="0" marL="0">
+            <a:pPr marL="0" indent="0">
               <a:buNone/>
             </a:pPr>
             <a:r>
@@ -12347,7 +11868,7 @@
           <a:bodyPr wrap="square" lIns="0" tIns="0" rIns="0" bIns="0" rtlCol="0" anchor="ctr"/>
           <a:lstStyle/>
           <a:p>
-            <a:pPr indent="0" marL="0">
+            <a:pPr marL="0" indent="0">
               <a:buNone/>
             </a:pPr>
             <a:r>
@@ -12386,7 +11907,7 @@
           <a:bodyPr wrap="square" lIns="0" tIns="0" rIns="0" bIns="0" rtlCol="0" anchor="ctr"/>
           <a:lstStyle/>
           <a:p>
-            <a:pPr indent="0" marL="0">
+            <a:pPr marL="0" indent="0">
               <a:buNone/>
             </a:pPr>
             <a:r>
@@ -12452,7 +11973,7 @@
           <a:bodyPr wrap="square" lIns="0" tIns="0" rIns="0" bIns="0" rtlCol="0" anchor="ctr"/>
           <a:lstStyle/>
           <a:p>
-            <a:pPr indent="0" marL="0">
+            <a:pPr marL="0" indent="0">
               <a:buNone/>
             </a:pPr>
             <a:r>
@@ -12491,7 +12012,7 @@
           <a:bodyPr wrap="square" lIns="0" tIns="0" rIns="0" bIns="0" rtlCol="0" anchor="ctr"/>
           <a:lstStyle/>
           <a:p>
-            <a:pPr indent="0" marL="0">
+            <a:pPr marL="0" indent="0">
               <a:buNone/>
             </a:pPr>
             <a:r>
@@ -12557,7 +12078,7 @@
           <a:bodyPr wrap="square" lIns="0" tIns="0" rIns="0" bIns="0" rtlCol="0" anchor="ctr"/>
           <a:lstStyle/>
           <a:p>
-            <a:pPr indent="0" marL="0">
+            <a:pPr marL="0" indent="0">
               <a:buNone/>
             </a:pPr>
             <a:r>
@@ -12596,7 +12117,7 @@
           <a:bodyPr wrap="square" lIns="0" tIns="0" rIns="0" bIns="0" rtlCol="0" anchor="ctr"/>
           <a:lstStyle/>
           <a:p>
-            <a:pPr indent="0" marL="0">
+            <a:pPr marL="0" indent="0">
               <a:buNone/>
             </a:pPr>
             <a:r>
@@ -12662,7 +12183,7 @@
           <a:bodyPr wrap="square" lIns="0" tIns="0" rIns="0" bIns="0" rtlCol="0" anchor="ctr"/>
           <a:lstStyle/>
           <a:p>
-            <a:pPr indent="0" marL="0">
+            <a:pPr marL="0" indent="0">
               <a:buNone/>
             </a:pPr>
             <a:r>
@@ -12701,7 +12222,7 @@
           <a:bodyPr wrap="square" lIns="0" tIns="0" rIns="0" bIns="0" rtlCol="0" anchor="ctr"/>
           <a:lstStyle/>
           <a:p>
-            <a:pPr indent="0" marL="0">
+            <a:pPr marL="0" indent="0">
               <a:buNone/>
             </a:pPr>
             <a:r>
@@ -12767,7 +12288,7 @@
           <a:bodyPr wrap="square" lIns="0" tIns="0" rIns="0" bIns="0" rtlCol="0" anchor="ctr"/>
           <a:lstStyle/>
           <a:p>
-            <a:pPr indent="0" marL="0">
+            <a:pPr marL="0" indent="0">
               <a:buNone/>
             </a:pPr>
             <a:r>
@@ -12806,7 +12327,7 @@
           <a:bodyPr wrap="square" lIns="0" tIns="0" rIns="0" bIns="0" rtlCol="0" anchor="ctr"/>
           <a:lstStyle/>
           <a:p>
-            <a:pPr indent="0" marL="0">
+            <a:pPr marL="0" indent="0">
               <a:buNone/>
             </a:pPr>
             <a:r>
@@ -12821,45 +12342,6 @@
               <a:t>Helps protect visitors and their data in transit</a:t>
             </a:r>
             <a:endParaRPr lang="en-US" sz="1400" dirty="0"/>
-          </a:p>
-        </p:txBody>
-      </p:sp>
-      <p:sp>
-        <p:nvSpPr>
-          <p:cNvPr id="27" name="Text 24"/>
-          <p:cNvSpPr txBox="1"/>
-          <p:nvPr/>
-        </p:nvSpPr>
-        <p:spPr>
-          <a:xfrm>
-            <a:off x="548640" y="6199632"/>
-            <a:ext cx="10972800" cy="228600"/>
-          </a:xfrm>
-          <a:prstGeom prst="rect">
-            <a:avLst/>
-          </a:prstGeom>
-          <a:noFill/>
-          <a:ln/>
-        </p:spPr>
-        <p:txBody>
-          <a:bodyPr wrap="square" lIns="0" tIns="0" rIns="0" bIns="0" rtlCol="0" anchor="ctr"/>
-          <a:lstStyle/>
-          <a:p>
-            <a:pPr indent="0" marL="0">
-              <a:buNone/>
-            </a:pPr>
-            <a:r>
-              <a:rPr lang="en-US" sz="1200" i="1" dirty="0">
-                <a:solidFill>
-                  <a:srgbClr val="475569"/>
-                </a:solidFill>
-                <a:latin typeface="Calibri" pitchFamily="34" charset="0"/>
-                <a:ea typeface="Calibri" pitchFamily="34" charset="-122"/>
-                <a:cs typeface="Calibri" pitchFamily="34" charset="-120"/>
-              </a:rPr>
-              <a:t>Some technical items were noted for follow-up and are listed on the Issues &amp; Improvements slide.</a:t>
-            </a:r>
-            <a:endParaRPr lang="en-US" sz="1200" dirty="0"/>
           </a:p>
         </p:txBody>
       </p:sp>
@@ -12879,6 +12361,7 @@
         <a:solidFill>
           <a:srgbClr val="FFFFFF"/>
         </a:solidFill>
+        <a:effectLst/>
       </p:bgPr>
     </p:bg>
     <p:spTree>
@@ -12916,11 +12399,11 @@
           <a:bodyPr wrap="square" lIns="0" tIns="0" rIns="0" bIns="0" rtlCol="0" anchor="ctr"/>
           <a:lstStyle/>
           <a:p>
-            <a:pPr indent="0" marL="0">
-              <a:buNone/>
-            </a:pPr>
-            <a:r>
-              <a:rPr lang="en-US" sz="1200" b="1" spc="300" kern="0" dirty="0">
+            <a:pPr marL="0" indent="0">
+              <a:buNone/>
+            </a:pPr>
+            <a:r>
+              <a:rPr lang="en-US" sz="1200" b="1" kern="0" spc="300" dirty="0">
                 <a:solidFill>
                   <a:srgbClr val="0086C7"/>
                 </a:solidFill>
@@ -12936,14 +12419,14 @@
       </p:sp>
       <p:pic>
         <p:nvPicPr>
-          <p:cNvPr id="3" name="Image 0" descr="C:/Projects/OGH/build/brand/logo_color_big.png">    </p:cNvPr>
+          <p:cNvPr id="3" name="Image 0" descr="C:/Projects/OGH/build/brand/logo_color_big.png"/>
           <p:cNvPicPr>
             <a:picLocks noChangeAspect="1"/>
           </p:cNvPicPr>
           <p:nvPr/>
         </p:nvPicPr>
         <p:blipFill>
-          <a:blip r:embed="rId1"/>
+          <a:blip r:embed="rId3"/>
           <a:stretch>
             <a:fillRect/>
           </a:stretch>
@@ -12979,7 +12462,7 @@
           <a:bodyPr wrap="square" lIns="0" tIns="0" rIns="0" bIns="0" rtlCol="0" anchor="t"/>
           <a:lstStyle/>
           <a:p>
-            <a:pPr indent="0" marL="0">
+            <a:pPr marL="0" indent="0">
               <a:buNone/>
             </a:pPr>
             <a:r>
@@ -13018,7 +12501,7 @@
           <a:bodyPr wrap="square" lIns="0" tIns="0" rIns="0" bIns="0" rtlCol="0" anchor="ctr"/>
           <a:lstStyle/>
           <a:p>
-            <a:pPr indent="0" marL="0">
+            <a:pPr marL="0" indent="0">
               <a:buNone/>
             </a:pPr>
             <a:r>
@@ -13057,7 +12540,7 @@
           <a:bodyPr wrap="square" lIns="0" tIns="0" rIns="0" bIns="0" rtlCol="0" anchor="ctr"/>
           <a:lstStyle/>
           <a:p>
-            <a:pPr algn="r" indent="0" marL="0">
+            <a:pPr marL="0" indent="0" algn="r">
               <a:buNone/>
             </a:pPr>
             <a:r>
@@ -13150,7 +12633,7 @@
           <a:bodyPr wrap="square" lIns="0" tIns="0" rIns="0" bIns="0" rtlCol="0" anchor="ctr"/>
           <a:lstStyle/>
           <a:p>
-            <a:pPr indent="0" marL="0">
+            <a:pPr marL="0" indent="0">
               <a:buNone/>
             </a:pPr>
             <a:r>
@@ -13170,7 +12653,7 @@
       </p:sp>
       <p:graphicFrame>
         <p:nvGraphicFramePr>
-          <p:cNvPr id="10" name="Chart 0" descr=""/>
+          <p:cNvPr id="10" name="Chart 0"/>
           <p:cNvGraphicFramePr/>
           <p:nvPr/>
         </p:nvGraphicFramePr>
@@ -13178,9 +12661,9 @@
           <a:off x="685800" y="2103120"/>
           <a:ext cx="5212080" cy="2286000"/>
         </p:xfrm>
-        <a:graphic xmlns:a="http://schemas.openxmlformats.org/drawingml/2006/main">
+        <a:graphic>
           <a:graphicData uri="http://schemas.openxmlformats.org/drawingml/2006/chart">
-            <c:chart xmlns:c="http://schemas.openxmlformats.org/drawingml/2006/chart" r:id="rId2"/>
+            <c:chart xmlns:c="http://schemas.openxmlformats.org/drawingml/2006/chart" xmlns:r="http://schemas.openxmlformats.org/officeDocument/2006/relationships" r:id="rId4"/>
           </a:graphicData>
         </a:graphic>
       </p:graphicFrame>
@@ -13290,7 +12773,7 @@
           <a:bodyPr wrap="square" lIns="0" tIns="0" rIns="0" bIns="0" rtlCol="0" anchor="ctr"/>
           <a:lstStyle/>
           <a:p>
-            <a:pPr indent="0" marL="0">
+            <a:pPr marL="0" indent="0">
               <a:buNone/>
             </a:pPr>
             <a:r>
@@ -13354,7 +12837,7 @@
           <a:bodyPr wrap="square" lIns="0" tIns="0" rIns="0" bIns="0" rtlCol="0" anchor="t"/>
           <a:lstStyle/>
           <a:p>
-            <a:pPr indent="0" marL="0">
+            <a:pPr marL="0" indent="0">
               <a:buNone/>
             </a:pPr>
             <a:r>
@@ -13374,13 +12857,186 @@
       </p:sp>
       <p:sp>
         <p:nvSpPr>
-          <p:cNvPr id="15" name="Shape 11"/>
+          <p:cNvPr id="16" name="Text 12"/>
+          <p:cNvSpPr txBox="1"/>
+          <p:nvPr/>
+        </p:nvSpPr>
+        <p:spPr>
+          <a:xfrm>
+            <a:off x="6995160" y="2770632"/>
+            <a:ext cx="4389120" cy="566928"/>
+          </a:xfrm>
+          <a:prstGeom prst="rect">
+            <a:avLst/>
+          </a:prstGeom>
+          <a:noFill/>
+          <a:ln/>
+        </p:spPr>
+        <p:txBody>
+          <a:bodyPr wrap="square" lIns="0" tIns="0" rIns="0" bIns="0" rtlCol="0" anchor="t"/>
+          <a:lstStyle/>
+          <a:p>
+            <a:pPr marL="0" indent="0">
+              <a:buNone/>
+            </a:pPr>
+            <a:r>
+              <a:rPr lang="en-US" sz="1300" dirty="0">
+                <a:solidFill>
+                  <a:srgbClr val="0F172A"/>
+                </a:solidFill>
+                <a:latin typeface="Calibri" pitchFamily="34" charset="0"/>
+                <a:ea typeface="Calibri" pitchFamily="34" charset="-122"/>
+                <a:cs typeface="Calibri" pitchFamily="34" charset="-120"/>
+              </a:rPr>
+              <a:t>Canonical addresses and social sharing tags found on sampled pages</a:t>
+            </a:r>
+            <a:endParaRPr lang="en-US" sz="1300" dirty="0"/>
+          </a:p>
+        </p:txBody>
+      </p:sp>
+      <p:sp>
+        <p:nvSpPr>
+          <p:cNvPr id="17" name="Shape 13"/>
           <p:cNvSpPr/>
           <p:nvPr/>
         </p:nvSpPr>
         <p:spPr>
           <a:xfrm>
-            <a:off x="6537960" y="2843784"/>
+            <a:off x="6537960" y="3465576"/>
+            <a:ext cx="274320" cy="274320"/>
+          </a:xfrm>
+          <a:prstGeom prst="ellipse">
+            <a:avLst/>
+          </a:prstGeom>
+          <a:solidFill>
+            <a:srgbClr val="16A34A"/>
+          </a:solidFill>
+          <a:ln w="12700">
+            <a:solidFill>
+              <a:srgbClr val="16A34A"/>
+            </a:solidFill>
+            <a:prstDash val="solid"/>
+          </a:ln>
+        </p:spPr>
+      </p:sp>
+      <p:sp>
+        <p:nvSpPr>
+          <p:cNvPr id="18" name="Text 14"/>
+          <p:cNvSpPr txBox="1"/>
+          <p:nvPr/>
+        </p:nvSpPr>
+        <p:spPr>
+          <a:xfrm>
+            <a:off x="6995160" y="3392424"/>
+            <a:ext cx="4389120" cy="566928"/>
+          </a:xfrm>
+          <a:prstGeom prst="rect">
+            <a:avLst/>
+          </a:prstGeom>
+          <a:noFill/>
+          <a:ln/>
+        </p:spPr>
+        <p:txBody>
+          <a:bodyPr wrap="square" lIns="0" tIns="0" rIns="0" bIns="0" rtlCol="0" anchor="t"/>
+          <a:lstStyle/>
+          <a:p>
+            <a:pPr marL="0" indent="0">
+              <a:buNone/>
+            </a:pPr>
+            <a:r>
+              <a:rPr lang="en-US" sz="1300" dirty="0">
+                <a:solidFill>
+                  <a:srgbClr val="0F172A"/>
+                </a:solidFill>
+                <a:latin typeface="Calibri" pitchFamily="34" charset="0"/>
+                <a:ea typeface="Calibri" pitchFamily="34" charset="-122"/>
+                <a:cs typeface="Calibri" pitchFamily="34" charset="-120"/>
+              </a:rPr>
+              <a:t>Structured data present (organisation, product, breadcrumbs)</a:t>
+            </a:r>
+            <a:endParaRPr lang="en-US" sz="1300" dirty="0"/>
+          </a:p>
+        </p:txBody>
+      </p:sp>
+      <p:sp>
+        <p:nvSpPr>
+          <p:cNvPr id="19" name="Shape 15"/>
+          <p:cNvSpPr/>
+          <p:nvPr/>
+        </p:nvSpPr>
+        <p:spPr>
+          <a:xfrm>
+            <a:off x="6537960" y="4087368"/>
+            <a:ext cx="274320" cy="274320"/>
+          </a:xfrm>
+          <a:prstGeom prst="ellipse">
+            <a:avLst/>
+          </a:prstGeom>
+          <a:solidFill>
+            <a:srgbClr val="16A34A"/>
+          </a:solidFill>
+          <a:ln w="12700">
+            <a:solidFill>
+              <a:srgbClr val="16A34A"/>
+            </a:solidFill>
+            <a:prstDash val="solid"/>
+          </a:ln>
+        </p:spPr>
+      </p:sp>
+      <p:sp>
+        <p:nvSpPr>
+          <p:cNvPr id="20" name="Text 16"/>
+          <p:cNvSpPr txBox="1"/>
+          <p:nvPr/>
+        </p:nvSpPr>
+        <p:spPr>
+          <a:xfrm>
+            <a:off x="6995160" y="4014216"/>
+            <a:ext cx="4389120" cy="566928"/>
+          </a:xfrm>
+          <a:prstGeom prst="rect">
+            <a:avLst/>
+          </a:prstGeom>
+          <a:noFill/>
+          <a:ln/>
+        </p:spPr>
+        <p:txBody>
+          <a:bodyPr wrap="square" lIns="0" tIns="0" rIns="0" bIns="0" rtlCol="0" anchor="t"/>
+          <a:lstStyle/>
+          <a:p>
+            <a:pPr marL="0" indent="0">
+              <a:buNone/>
+            </a:pPr>
+            <a:r>
+              <a:rPr lang="en-US" sz="1300" dirty="0">
+                <a:solidFill>
+                  <a:srgbClr val="0F172A"/>
+                </a:solidFill>
+                <a:latin typeface="Calibri" pitchFamily="34" charset="0"/>
+                <a:ea typeface="Calibri" pitchFamily="34" charset="-122"/>
+                <a:cs typeface="Calibri" pitchFamily="34" charset="-120"/>
+              </a:rPr>
+              <a:t>No pages blocked from search engines in the sample</a:t>
+            </a:r>
+            <a:endParaRPr lang="en-US" sz="1300" dirty="0"/>
+          </a:p>
+        </p:txBody>
+      </p:sp>
+      <p:sp>
+        <p:nvSpPr>
+          <p:cNvPr id="30" name="Shape 17">
+            <a:extLst>
+              <a:ext uri="{FF2B5EF4-FFF2-40B4-BE49-F238E27FC236}">
+                <a16:creationId xmlns:a16="http://schemas.microsoft.com/office/drawing/2014/main" id="{97678EE9-A401-8420-C9D2-1F829123B75D}"/>
+              </a:ext>
+            </a:extLst>
+          </p:cNvPr>
+          <p:cNvSpPr/>
+          <p:nvPr/>
+        </p:nvSpPr>
+        <p:spPr>
+          <a:xfrm>
+            <a:off x="6537960" y="4709160"/>
             <a:ext cx="274320" cy="274320"/>
           </a:xfrm>
           <a:prstGeom prst="ellipse">
@@ -13399,13 +13055,19 @@
       </p:sp>
       <p:sp>
         <p:nvSpPr>
-          <p:cNvPr id="16" name="Text 12"/>
-          <p:cNvSpPr txBox="1"/>
-          <p:nvPr/>
-        </p:nvSpPr>
-        <p:spPr>
-          <a:xfrm>
-            <a:off x="6995160" y="2770632"/>
+          <p:cNvPr id="31" name="Text 18">
+            <a:extLst>
+              <a:ext uri="{FF2B5EF4-FFF2-40B4-BE49-F238E27FC236}">
+                <a16:creationId xmlns:a16="http://schemas.microsoft.com/office/drawing/2014/main" id="{0DA4BC05-0C6C-5D99-62BA-C43C6238D0CE}"/>
+              </a:ext>
+            </a:extLst>
+          </p:cNvPr>
+          <p:cNvSpPr txBox="1"/>
+          <p:nvPr/>
+        </p:nvSpPr>
+        <p:spPr>
+          <a:xfrm>
+            <a:off x="6995160" y="4636008"/>
             <a:ext cx="4389120" cy="566928"/>
           </a:xfrm>
           <a:prstGeom prst="rect">
@@ -13418,7 +13080,7 @@
           <a:bodyPr wrap="square" lIns="0" tIns="0" rIns="0" bIns="0" rtlCol="0" anchor="t"/>
           <a:lstStyle/>
           <a:p>
-            <a:pPr indent="0" marL="0">
+            <a:pPr marL="0" indent="0">
               <a:buNone/>
             </a:pPr>
             <a:r>
@@ -13430,7 +13092,7 @@
                 <a:ea typeface="Calibri" pitchFamily="34" charset="-122"/>
                 <a:cs typeface="Calibri" pitchFamily="34" charset="-120"/>
               </a:rPr>
-              <a:t>2 sampled pages missing canonical addresses or social sharing tags</a:t>
+              <a:t>3 of 19 sampled pages have no meta description</a:t>
             </a:r>
             <a:endParaRPr lang="en-US" sz="1300" dirty="0"/>
           </a:p>
@@ -13438,13 +13100,95 @@
       </p:sp>
       <p:sp>
         <p:nvSpPr>
-          <p:cNvPr id="17" name="Shape 13"/>
+          <p:cNvPr id="32" name="Shape 19">
+            <a:extLst>
+              <a:ext uri="{FF2B5EF4-FFF2-40B4-BE49-F238E27FC236}">
+                <a16:creationId xmlns:a16="http://schemas.microsoft.com/office/drawing/2014/main" id="{5B290BAC-A480-056B-5837-EE04D5780373}"/>
+              </a:ext>
+            </a:extLst>
+          </p:cNvPr>
           <p:cNvSpPr/>
           <p:nvPr/>
         </p:nvSpPr>
         <p:spPr>
           <a:xfrm>
-            <a:off x="6537960" y="3465576"/>
+            <a:off x="6537960" y="5330952"/>
+            <a:ext cx="274320" cy="274320"/>
+          </a:xfrm>
+          <a:prstGeom prst="ellipse">
+            <a:avLst/>
+          </a:prstGeom>
+          <a:solidFill>
+            <a:srgbClr val="D9962B"/>
+          </a:solidFill>
+          <a:ln w="12700">
+            <a:solidFill>
+              <a:srgbClr val="D9962B"/>
+            </a:solidFill>
+            <a:prstDash val="solid"/>
+          </a:ln>
+        </p:spPr>
+      </p:sp>
+      <p:sp>
+        <p:nvSpPr>
+          <p:cNvPr id="33" name="Text 20">
+            <a:extLst>
+              <a:ext uri="{FF2B5EF4-FFF2-40B4-BE49-F238E27FC236}">
+                <a16:creationId xmlns:a16="http://schemas.microsoft.com/office/drawing/2014/main" id="{503AEEEF-BE71-9215-1180-AFF874834AC3}"/>
+              </a:ext>
+            </a:extLst>
+          </p:cNvPr>
+          <p:cNvSpPr txBox="1"/>
+          <p:nvPr/>
+        </p:nvSpPr>
+        <p:spPr>
+          <a:xfrm>
+            <a:off x="6995160" y="5257800"/>
+            <a:ext cx="4389120" cy="566928"/>
+          </a:xfrm>
+          <a:prstGeom prst="rect">
+            <a:avLst/>
+          </a:prstGeom>
+          <a:noFill/>
+          <a:ln/>
+        </p:spPr>
+        <p:txBody>
+          <a:bodyPr wrap="square" lIns="0" tIns="0" rIns="0" bIns="0" rtlCol="0" anchor="t"/>
+          <a:lstStyle/>
+          <a:p>
+            <a:pPr marL="0" indent="0">
+              <a:buNone/>
+            </a:pPr>
+            <a:r>
+              <a:rPr lang="en-US" sz="1300" dirty="0">
+                <a:solidFill>
+                  <a:srgbClr val="0F172A"/>
+                </a:solidFill>
+                <a:latin typeface="Calibri" pitchFamily="34" charset="0"/>
+                <a:ea typeface="Calibri" pitchFamily="34" charset="-122"/>
+                <a:cs typeface="Calibri" pitchFamily="34" charset="-120"/>
+              </a:rPr>
+              <a:t>A few pages have missing or repeated headings</a:t>
+            </a:r>
+            <a:endParaRPr lang="en-US" sz="1300" dirty="0"/>
+          </a:p>
+        </p:txBody>
+      </p:sp>
+      <p:sp>
+        <p:nvSpPr>
+          <p:cNvPr id="35" name="Shape 9">
+            <a:extLst>
+              <a:ext uri="{FF2B5EF4-FFF2-40B4-BE49-F238E27FC236}">
+                <a16:creationId xmlns:a16="http://schemas.microsoft.com/office/drawing/2014/main" id="{01B0849C-F35C-BF34-466C-21F954F3A85E}"/>
+              </a:ext>
+            </a:extLst>
+          </p:cNvPr>
+          <p:cNvSpPr/>
+          <p:nvPr/>
+        </p:nvSpPr>
+        <p:spPr>
+          <a:xfrm>
+            <a:off x="6532190" y="2841654"/>
             <a:ext cx="274320" cy="274320"/>
           </a:xfrm>
           <a:prstGeom prst="ellipse">
@@ -13460,276 +13204,6 @@
             <a:prstDash val="solid"/>
           </a:ln>
         </p:spPr>
-      </p:sp>
-      <p:sp>
-        <p:nvSpPr>
-          <p:cNvPr id="18" name="Text 14"/>
-          <p:cNvSpPr txBox="1"/>
-          <p:nvPr/>
-        </p:nvSpPr>
-        <p:spPr>
-          <a:xfrm>
-            <a:off x="6995160" y="3392424"/>
-            <a:ext cx="4389120" cy="566928"/>
-          </a:xfrm>
-          <a:prstGeom prst="rect">
-            <a:avLst/>
-          </a:prstGeom>
-          <a:noFill/>
-          <a:ln/>
-        </p:spPr>
-        <p:txBody>
-          <a:bodyPr wrap="square" lIns="0" tIns="0" rIns="0" bIns="0" rtlCol="0" anchor="t"/>
-          <a:lstStyle/>
-          <a:p>
-            <a:pPr indent="0" marL="0">
-              <a:buNone/>
-            </a:pPr>
-            <a:r>
-              <a:rPr lang="en-US" sz="1300" dirty="0">
-                <a:solidFill>
-                  <a:srgbClr val="0F172A"/>
-                </a:solidFill>
-                <a:latin typeface="Calibri" pitchFamily="34" charset="0"/>
-                <a:ea typeface="Calibri" pitchFamily="34" charset="-122"/>
-                <a:cs typeface="Calibri" pitchFamily="34" charset="-120"/>
-              </a:rPr>
-              <a:t>Structured data present (organisation, product, breadcrumbs)</a:t>
-            </a:r>
-            <a:endParaRPr lang="en-US" sz="1300" dirty="0"/>
-          </a:p>
-        </p:txBody>
-      </p:sp>
-      <p:sp>
-        <p:nvSpPr>
-          <p:cNvPr id="19" name="Shape 15"/>
-          <p:cNvSpPr/>
-          <p:nvPr/>
-        </p:nvSpPr>
-        <p:spPr>
-          <a:xfrm>
-            <a:off x="6537960" y="4087368"/>
-            <a:ext cx="274320" cy="274320"/>
-          </a:xfrm>
-          <a:prstGeom prst="ellipse">
-            <a:avLst/>
-          </a:prstGeom>
-          <a:solidFill>
-            <a:srgbClr val="16A34A"/>
-          </a:solidFill>
-          <a:ln w="12700">
-            <a:solidFill>
-              <a:srgbClr val="16A34A"/>
-            </a:solidFill>
-            <a:prstDash val="solid"/>
-          </a:ln>
-        </p:spPr>
-      </p:sp>
-      <p:sp>
-        <p:nvSpPr>
-          <p:cNvPr id="20" name="Text 16"/>
-          <p:cNvSpPr txBox="1"/>
-          <p:nvPr/>
-        </p:nvSpPr>
-        <p:spPr>
-          <a:xfrm>
-            <a:off x="6995160" y="4014216"/>
-            <a:ext cx="4389120" cy="566928"/>
-          </a:xfrm>
-          <a:prstGeom prst="rect">
-            <a:avLst/>
-          </a:prstGeom>
-          <a:noFill/>
-          <a:ln/>
-        </p:spPr>
-        <p:txBody>
-          <a:bodyPr wrap="square" lIns="0" tIns="0" rIns="0" bIns="0" rtlCol="0" anchor="t"/>
-          <a:lstStyle/>
-          <a:p>
-            <a:pPr indent="0" marL="0">
-              <a:buNone/>
-            </a:pPr>
-            <a:r>
-              <a:rPr lang="en-US" sz="1300" dirty="0">
-                <a:solidFill>
-                  <a:srgbClr val="0F172A"/>
-                </a:solidFill>
-                <a:latin typeface="Calibri" pitchFamily="34" charset="0"/>
-                <a:ea typeface="Calibri" pitchFamily="34" charset="-122"/>
-                <a:cs typeface="Calibri" pitchFamily="34" charset="-120"/>
-              </a:rPr>
-              <a:t>No pages blocked from search engines in the sample</a:t>
-            </a:r>
-            <a:endParaRPr lang="en-US" sz="1300" dirty="0"/>
-          </a:p>
-        </p:txBody>
-      </p:sp>
-      <p:sp>
-        <p:nvSpPr>
-          <p:cNvPr id="21" name="Shape 17"/>
-          <p:cNvSpPr/>
-          <p:nvPr/>
-        </p:nvSpPr>
-        <p:spPr>
-          <a:xfrm>
-            <a:off x="6537960" y="4709160"/>
-            <a:ext cx="274320" cy="274320"/>
-          </a:xfrm>
-          <a:prstGeom prst="ellipse">
-            <a:avLst/>
-          </a:prstGeom>
-          <a:solidFill>
-            <a:srgbClr val="D9962B"/>
-          </a:solidFill>
-          <a:ln w="12700">
-            <a:solidFill>
-              <a:srgbClr val="D9962B"/>
-            </a:solidFill>
-            <a:prstDash val="solid"/>
-          </a:ln>
-        </p:spPr>
-      </p:sp>
-      <p:sp>
-        <p:nvSpPr>
-          <p:cNvPr id="22" name="Text 18"/>
-          <p:cNvSpPr txBox="1"/>
-          <p:nvPr/>
-        </p:nvSpPr>
-        <p:spPr>
-          <a:xfrm>
-            <a:off x="6995160" y="4636008"/>
-            <a:ext cx="4389120" cy="566928"/>
-          </a:xfrm>
-          <a:prstGeom prst="rect">
-            <a:avLst/>
-          </a:prstGeom>
-          <a:noFill/>
-          <a:ln/>
-        </p:spPr>
-        <p:txBody>
-          <a:bodyPr wrap="square" lIns="0" tIns="0" rIns="0" bIns="0" rtlCol="0" anchor="t"/>
-          <a:lstStyle/>
-          <a:p>
-            <a:pPr indent="0" marL="0">
-              <a:buNone/>
-            </a:pPr>
-            <a:r>
-              <a:rPr lang="en-US" sz="1300" dirty="0">
-                <a:solidFill>
-                  <a:srgbClr val="0F172A"/>
-                </a:solidFill>
-                <a:latin typeface="Calibri" pitchFamily="34" charset="0"/>
-                <a:ea typeface="Calibri" pitchFamily="34" charset="-122"/>
-                <a:cs typeface="Calibri" pitchFamily="34" charset="-120"/>
-              </a:rPr>
-              <a:t>3 of 19 sampled pages have no meta description</a:t>
-            </a:r>
-            <a:endParaRPr lang="en-US" sz="1300" dirty="0"/>
-          </a:p>
-        </p:txBody>
-      </p:sp>
-      <p:sp>
-        <p:nvSpPr>
-          <p:cNvPr id="23" name="Shape 19"/>
-          <p:cNvSpPr/>
-          <p:nvPr/>
-        </p:nvSpPr>
-        <p:spPr>
-          <a:xfrm>
-            <a:off x="6537960" y="5330952"/>
-            <a:ext cx="274320" cy="274320"/>
-          </a:xfrm>
-          <a:prstGeom prst="ellipse">
-            <a:avLst/>
-          </a:prstGeom>
-          <a:solidFill>
-            <a:srgbClr val="D9962B"/>
-          </a:solidFill>
-          <a:ln w="12700">
-            <a:solidFill>
-              <a:srgbClr val="D9962B"/>
-            </a:solidFill>
-            <a:prstDash val="solid"/>
-          </a:ln>
-        </p:spPr>
-      </p:sp>
-      <p:sp>
-        <p:nvSpPr>
-          <p:cNvPr id="24" name="Text 20"/>
-          <p:cNvSpPr txBox="1"/>
-          <p:nvPr/>
-        </p:nvSpPr>
-        <p:spPr>
-          <a:xfrm>
-            <a:off x="6995160" y="5257800"/>
-            <a:ext cx="4389120" cy="566928"/>
-          </a:xfrm>
-          <a:prstGeom prst="rect">
-            <a:avLst/>
-          </a:prstGeom>
-          <a:noFill/>
-          <a:ln/>
-        </p:spPr>
-        <p:txBody>
-          <a:bodyPr wrap="square" lIns="0" tIns="0" rIns="0" bIns="0" rtlCol="0" anchor="t"/>
-          <a:lstStyle/>
-          <a:p>
-            <a:pPr indent="0" marL="0">
-              <a:buNone/>
-            </a:pPr>
-            <a:r>
-              <a:rPr lang="en-US" sz="1300" dirty="0">
-                <a:solidFill>
-                  <a:srgbClr val="0F172A"/>
-                </a:solidFill>
-                <a:latin typeface="Calibri" pitchFamily="34" charset="0"/>
-                <a:ea typeface="Calibri" pitchFamily="34" charset="-122"/>
-                <a:cs typeface="Calibri" pitchFamily="34" charset="-120"/>
-              </a:rPr>
-              <a:t>A few pages have missing or repeated headings</a:t>
-            </a:r>
-            <a:endParaRPr lang="en-US" sz="1300" dirty="0"/>
-          </a:p>
-        </p:txBody>
-      </p:sp>
-      <p:sp>
-        <p:nvSpPr>
-          <p:cNvPr id="25" name="Text 21"/>
-          <p:cNvSpPr txBox="1"/>
-          <p:nvPr/>
-        </p:nvSpPr>
-        <p:spPr>
-          <a:xfrm>
-            <a:off x="6537960" y="5852160"/>
-            <a:ext cx="4937760" cy="274320"/>
-          </a:xfrm>
-          <a:prstGeom prst="rect">
-            <a:avLst/>
-          </a:prstGeom>
-          <a:noFill/>
-          <a:ln/>
-        </p:spPr>
-        <p:txBody>
-          <a:bodyPr wrap="square" lIns="0" tIns="0" rIns="0" bIns="0" rtlCol="0" anchor="ctr"/>
-          <a:lstStyle/>
-          <a:p>
-            <a:pPr indent="0" marL="0">
-              <a:buNone/>
-            </a:pPr>
-            <a:r>
-              <a:rPr lang="en-US" sz="1100" i="1" dirty="0">
-                <a:solidFill>
-                  <a:srgbClr val="475569"/>
-                </a:solidFill>
-                <a:latin typeface="Calibri" pitchFamily="34" charset="0"/>
-                <a:ea typeface="Calibri" pitchFamily="34" charset="-122"/>
-                <a:cs typeface="Calibri" pitchFamily="34" charset="-120"/>
-              </a:rPr>
-              <a:t>Amber items are recommendations, not confirmed problems for visitors.</a:t>
-            </a:r>
-            <a:endParaRPr lang="en-US" sz="1100" dirty="0"/>
-          </a:p>
-        </p:txBody>
       </p:sp>
     </p:spTree>
   </p:cSld>
@@ -13747,6 +13221,7 @@
         <a:solidFill>
           <a:srgbClr val="FFFFFF"/>
         </a:solidFill>
+        <a:effectLst/>
       </p:bgPr>
     </p:bg>
     <p:spTree>
@@ -13784,11 +13259,11 @@
           <a:bodyPr wrap="square" lIns="0" tIns="0" rIns="0" bIns="0" rtlCol="0" anchor="ctr"/>
           <a:lstStyle/>
           <a:p>
-            <a:pPr indent="0" marL="0">
-              <a:buNone/>
-            </a:pPr>
-            <a:r>
-              <a:rPr lang="en-US" sz="1200" b="1" spc="300" kern="0" dirty="0">
+            <a:pPr marL="0" indent="0">
+              <a:buNone/>
+            </a:pPr>
+            <a:r>
+              <a:rPr lang="en-US" sz="1200" b="1" kern="0" spc="300" dirty="0">
                 <a:solidFill>
                   <a:srgbClr val="0086C7"/>
                 </a:solidFill>
@@ -13804,14 +13279,14 @@
       </p:sp>
       <p:pic>
         <p:nvPicPr>
-          <p:cNvPr id="3" name="Image 0" descr="C:/Projects/OGH/build/brand/logo_color_big.png">    </p:cNvPr>
+          <p:cNvPr id="3" name="Image 0" descr="C:/Projects/OGH/build/brand/logo_color_big.png"/>
           <p:cNvPicPr>
             <a:picLocks noChangeAspect="1"/>
           </p:cNvPicPr>
           <p:nvPr/>
         </p:nvPicPr>
         <p:blipFill>
-          <a:blip r:embed="rId1"/>
+          <a:blip r:embed="rId3"/>
           <a:stretch>
             <a:fillRect/>
           </a:stretch>
@@ -13847,7 +13322,7 @@
           <a:bodyPr wrap="square" lIns="0" tIns="0" rIns="0" bIns="0" rtlCol="0" anchor="t"/>
           <a:lstStyle/>
           <a:p>
-            <a:pPr indent="0" marL="0">
+            <a:pPr marL="0" indent="0">
               <a:buNone/>
             </a:pPr>
             <a:r>
@@ -13886,7 +13361,7 @@
           <a:bodyPr wrap="square" lIns="0" tIns="0" rIns="0" bIns="0" rtlCol="0" anchor="ctr"/>
           <a:lstStyle/>
           <a:p>
-            <a:pPr indent="0" marL="0">
+            <a:pPr marL="0" indent="0">
               <a:buNone/>
             </a:pPr>
             <a:r>
@@ -13925,7 +13400,7 @@
           <a:bodyPr wrap="square" lIns="0" tIns="0" rIns="0" bIns="0" rtlCol="0" anchor="ctr"/>
           <a:lstStyle/>
           <a:p>
-            <a:pPr algn="r" indent="0" marL="0">
+            <a:pPr marL="0" indent="0" algn="r">
               <a:buNone/>
             </a:pPr>
             <a:r>
@@ -13964,7 +13439,7 @@
           <a:bodyPr wrap="square" lIns="0" tIns="0" rIns="0" bIns="0" rtlCol="0" anchor="ctr"/>
           <a:lstStyle/>
           <a:p>
-            <a:pPr indent="0" marL="0">
+            <a:pPr marL="0" indent="0">
               <a:buNone/>
             </a:pPr>
             <a:r>
@@ -14063,14 +13538,14 @@
       </p:sp>
       <p:pic>
         <p:nvPicPr>
-          <p:cNvPr id="11" name="Image 1" descr="preencoded.png">    </p:cNvPr>
+          <p:cNvPr id="11" name="Image 1" descr="preencoded.png"/>
           <p:cNvPicPr>
             <a:picLocks noChangeAspect="1"/>
           </p:cNvPicPr>
           <p:nvPr/>
         </p:nvPicPr>
         <p:blipFill>
-          <a:blip r:embed="rId2"/>
+          <a:blip r:embed="rId4"/>
           <a:stretch>
             <a:fillRect/>
           </a:stretch>
@@ -14106,7 +13581,7 @@
           <a:bodyPr wrap="square" lIns="0" tIns="0" rIns="0" bIns="0" rtlCol="0" anchor="ctr"/>
           <a:lstStyle/>
           <a:p>
-            <a:pPr indent="0" marL="0">
+            <a:pPr marL="0" indent="0">
               <a:buNone/>
             </a:pPr>
             <a:r>
@@ -14257,14 +13732,14 @@
       </p:sp>
       <p:pic>
         <p:nvPicPr>
-          <p:cNvPr id="15" name="Image 2" descr="preencoded.png">    </p:cNvPr>
+          <p:cNvPr id="15" name="Image 2" descr="preencoded.png"/>
           <p:cNvPicPr>
             <a:picLocks noChangeAspect="1"/>
           </p:cNvPicPr>
           <p:nvPr/>
         </p:nvPicPr>
         <p:blipFill>
-          <a:blip r:embed="rId3"/>
+          <a:blip r:embed="rId5"/>
           <a:stretch>
             <a:fillRect/>
           </a:stretch>
@@ -14300,7 +13775,7 @@
           <a:bodyPr wrap="square" lIns="0" tIns="0" rIns="0" bIns="0" rtlCol="0" anchor="ctr"/>
           <a:lstStyle/>
           <a:p>
-            <a:pPr indent="0" marL="0">
+            <a:pPr marL="0" indent="0">
               <a:buNone/>
             </a:pPr>
             <a:r>
@@ -14440,6 +13915,7 @@
         <a:solidFill>
           <a:srgbClr val="FFFFFF"/>
         </a:solidFill>
+        <a:effectLst/>
       </p:bgPr>
     </p:bg>
     <p:spTree>
@@ -14477,11 +13953,11 @@
           <a:bodyPr wrap="square" lIns="0" tIns="0" rIns="0" bIns="0" rtlCol="0" anchor="ctr"/>
           <a:lstStyle/>
           <a:p>
-            <a:pPr indent="0" marL="0">
-              <a:buNone/>
-            </a:pPr>
-            <a:r>
-              <a:rPr lang="en-US" sz="1200" b="1" spc="300" kern="0" dirty="0">
+            <a:pPr marL="0" indent="0">
+              <a:buNone/>
+            </a:pPr>
+            <a:r>
+              <a:rPr lang="en-US" sz="1200" b="1" kern="0" spc="300" dirty="0">
                 <a:solidFill>
                   <a:srgbClr val="0086C7"/>
                 </a:solidFill>
@@ -14497,14 +13973,14 @@
       </p:sp>
       <p:pic>
         <p:nvPicPr>
-          <p:cNvPr id="3" name="Image 0" descr="C:/Projects/OGH/build/brand/logo_color_big.png">    </p:cNvPr>
+          <p:cNvPr id="3" name="Image 0" descr="C:/Projects/OGH/build/brand/logo_color_big.png"/>
           <p:cNvPicPr>
             <a:picLocks noChangeAspect="1"/>
           </p:cNvPicPr>
           <p:nvPr/>
         </p:nvPicPr>
         <p:blipFill>
-          <a:blip r:embed="rId1"/>
+          <a:blip r:embed="rId3"/>
           <a:stretch>
             <a:fillRect/>
           </a:stretch>
@@ -14540,7 +14016,7 @@
           <a:bodyPr wrap="square" lIns="0" tIns="0" rIns="0" bIns="0" rtlCol="0" anchor="t"/>
           <a:lstStyle/>
           <a:p>
-            <a:pPr indent="0" marL="0">
+            <a:pPr marL="0" indent="0">
               <a:buNone/>
             </a:pPr>
             <a:r>
@@ -14579,7 +14055,7 @@
           <a:bodyPr wrap="square" lIns="0" tIns="0" rIns="0" bIns="0" rtlCol="0" anchor="ctr"/>
           <a:lstStyle/>
           <a:p>
-            <a:pPr indent="0" marL="0">
+            <a:pPr marL="0" indent="0">
               <a:buNone/>
             </a:pPr>
             <a:r>
@@ -14618,7 +14094,7 @@
           <a:bodyPr wrap="square" lIns="0" tIns="0" rIns="0" bIns="0" rtlCol="0" anchor="ctr"/>
           <a:lstStyle/>
           <a:p>
-            <a:pPr algn="r" indent="0" marL="0">
+            <a:pPr marL="0" indent="0" algn="r">
               <a:buNone/>
             </a:pPr>
             <a:r>
@@ -14690,14 +14166,14 @@
       </p:sp>
       <p:pic>
         <p:nvPicPr>
-          <p:cNvPr id="9" name="Image 1" descr="preencoded.png">    </p:cNvPr>
+          <p:cNvPr id="9" name="Image 1" descr="preencoded.png"/>
           <p:cNvPicPr>
             <a:picLocks noChangeAspect="1"/>
           </p:cNvPicPr>
           <p:nvPr/>
         </p:nvPicPr>
         <p:blipFill>
-          <a:blip r:embed="rId2"/>
+          <a:blip r:embed="rId4"/>
           <a:stretch>
             <a:fillRect/>
           </a:stretch>
@@ -14733,7 +14209,7 @@
           <a:bodyPr wrap="square" lIns="0" tIns="0" rIns="0" bIns="0" rtlCol="0" anchor="ctr"/>
           <a:lstStyle/>
           <a:p>
-            <a:pPr indent="0" marL="0">
+            <a:pPr marL="0" indent="0">
               <a:buNone/>
             </a:pPr>
             <a:r>
@@ -14911,14 +14387,14 @@
       </p:sp>
       <p:pic>
         <p:nvPicPr>
-          <p:cNvPr id="14" name="Image 2" descr="preencoded.png">    </p:cNvPr>
+          <p:cNvPr id="14" name="Image 2" descr="preencoded.png"/>
           <p:cNvPicPr>
             <a:picLocks noChangeAspect="1"/>
           </p:cNvPicPr>
           <p:nvPr/>
         </p:nvPicPr>
         <p:blipFill>
-          <a:blip r:embed="rId3"/>
+          <a:blip r:embed="rId5"/>
           <a:stretch>
             <a:fillRect/>
           </a:stretch>
@@ -14954,7 +14430,7 @@
           <a:bodyPr wrap="square" lIns="0" tIns="0" rIns="0" bIns="0" rtlCol="0" anchor="ctr"/>
           <a:lstStyle/>
           <a:p>
-            <a:pPr indent="0" marL="0">
+            <a:pPr marL="0" indent="0">
               <a:buNone/>
             </a:pPr>
             <a:r>
@@ -15132,14 +14608,14 @@
       </p:sp>
       <p:pic>
         <p:nvPicPr>
-          <p:cNvPr id="19" name="Image 3" descr="preencoded.png">    </p:cNvPr>
+          <p:cNvPr id="19" name="Image 3" descr="preencoded.png"/>
           <p:cNvPicPr>
             <a:picLocks noChangeAspect="1"/>
           </p:cNvPicPr>
           <p:nvPr/>
         </p:nvPicPr>
         <p:blipFill>
-          <a:blip r:embed="rId4"/>
+          <a:blip r:embed="rId6"/>
           <a:stretch>
             <a:fillRect/>
           </a:stretch>
@@ -15175,7 +14651,7 @@
           <a:bodyPr wrap="square" lIns="0" tIns="0" rIns="0" bIns="0" rtlCol="0" anchor="ctr"/>
           <a:lstStyle/>
           <a:p>
-            <a:pPr indent="0" marL="0">
+            <a:pPr marL="0" indent="0">
               <a:buNone/>
             </a:pPr>
             <a:r>
@@ -15353,14 +14829,14 @@
       </p:sp>
       <p:pic>
         <p:nvPicPr>
-          <p:cNvPr id="24" name="Image 4" descr="preencoded.png">    </p:cNvPr>
+          <p:cNvPr id="24" name="Image 4" descr="preencoded.png"/>
           <p:cNvPicPr>
             <a:picLocks noChangeAspect="1"/>
           </p:cNvPicPr>
           <p:nvPr/>
         </p:nvPicPr>
         <p:blipFill>
-          <a:blip r:embed="rId5"/>
+          <a:blip r:embed="rId7"/>
           <a:stretch>
             <a:fillRect/>
           </a:stretch>
@@ -15396,7 +14872,7 @@
           <a:bodyPr wrap="square" lIns="0" tIns="0" rIns="0" bIns="0" rtlCol="0" anchor="ctr"/>
           <a:lstStyle/>
           <a:p>
-            <a:pPr indent="0" marL="0">
+            <a:pPr marL="0" indent="0">
               <a:buNone/>
             </a:pPr>
             <a:r>
@@ -15574,14 +15050,14 @@
       </p:sp>
       <p:pic>
         <p:nvPicPr>
-          <p:cNvPr id="29" name="Image 5" descr="preencoded.png">    </p:cNvPr>
+          <p:cNvPr id="29" name="Image 5" descr="preencoded.png"/>
           <p:cNvPicPr>
             <a:picLocks noChangeAspect="1"/>
           </p:cNvPicPr>
           <p:nvPr/>
         </p:nvPicPr>
         <p:blipFill>
-          <a:blip r:embed="rId6"/>
+          <a:blip r:embed="rId8"/>
           <a:stretch>
             <a:fillRect/>
           </a:stretch>
@@ -15617,7 +15093,7 @@
           <a:bodyPr wrap="square" lIns="0" tIns="0" rIns="0" bIns="0" rtlCol="0" anchor="ctr"/>
           <a:lstStyle/>
           <a:p>
-            <a:pPr indent="0" marL="0">
+            <a:pPr marL="0" indent="0">
               <a:buNone/>
             </a:pPr>
             <a:r>
@@ -15789,7 +15265,7 @@
           <a:bodyPr wrap="square" lIns="0" tIns="0" rIns="0" bIns="0" rtlCol="0" anchor="ctr"/>
           <a:lstStyle/>
           <a:p>
-            <a:pPr indent="0" marL="0">
+            <a:pPr marL="0" indent="0">
               <a:buNone/>
             </a:pPr>
             <a:r>
@@ -15828,7 +15304,7 @@
           <a:bodyPr wrap="square" lIns="0" tIns="0" rIns="0" bIns="0" rtlCol="0" anchor="t"/>
           <a:lstStyle/>
           <a:p>
-            <a:pPr indent="0" marL="0">
+            <a:pPr marL="0" indent="0">
               <a:buNone/>
             </a:pPr>
             <a:r>
@@ -16147,4 +15623,319 @@
     </a:ext>
   </a:extLst>
 </a:theme>
+</file>
+
+<file path=ppt/theme/theme2.xml><?xml version="1.0" encoding="utf-8"?>
+<a:theme xmlns:a="http://schemas.openxmlformats.org/drawingml/2006/main" name="Office Theme">
+  <a:themeElements>
+    <a:clrScheme name="Office">
+      <a:dk1>
+        <a:sysClr val="windowText" lastClr="000000"/>
+      </a:dk1>
+      <a:lt1>
+        <a:sysClr val="window" lastClr="FFFFFF"/>
+      </a:lt1>
+      <a:dk2>
+        <a:srgbClr val="0E2841"/>
+      </a:dk2>
+      <a:lt2>
+        <a:srgbClr val="E8E8E8"/>
+      </a:lt2>
+      <a:accent1>
+        <a:srgbClr val="156082"/>
+      </a:accent1>
+      <a:accent2>
+        <a:srgbClr val="E97132"/>
+      </a:accent2>
+      <a:accent3>
+        <a:srgbClr val="196B24"/>
+      </a:accent3>
+      <a:accent4>
+        <a:srgbClr val="0F9ED5"/>
+      </a:accent4>
+      <a:accent5>
+        <a:srgbClr val="A02B93"/>
+      </a:accent5>
+      <a:accent6>
+        <a:srgbClr val="4EA72E"/>
+      </a:accent6>
+      <a:hlink>
+        <a:srgbClr val="467886"/>
+      </a:hlink>
+      <a:folHlink>
+        <a:srgbClr val="96607D"/>
+      </a:folHlink>
+    </a:clrScheme>
+    <a:fontScheme name="Office">
+      <a:majorFont>
+        <a:latin typeface="Aptos Display" panose="02110004020202020204"/>
+        <a:ea typeface=""/>
+        <a:cs typeface=""/>
+        <a:font script="Jpan" typeface="游ゴシック Light"/>
+        <a:font script="Hang" typeface="맑은 고딕"/>
+        <a:font script="Hans" typeface="等线 Light"/>
+        <a:font script="Hant" typeface="新細明體"/>
+        <a:font script="Arab" typeface="Times New Roman"/>
+        <a:font script="Hebr" typeface="Times New Roman"/>
+        <a:font script="Thai" typeface="Angsana New"/>
+        <a:font script="Ethi" typeface="Nyala"/>
+        <a:font script="Beng" typeface="Vrinda"/>
+        <a:font script="Gujr" typeface="Shruti"/>
+        <a:font script="Khmr" typeface="MoolBoran"/>
+        <a:font script="Knda" typeface="Tunga"/>
+        <a:font script="Guru" typeface="Raavi"/>
+        <a:font script="Cans" typeface="Euphemia"/>
+        <a:font script="Cher" typeface="Plantagenet Cherokee"/>
+        <a:font script="Yiii" typeface="Microsoft Yi Baiti"/>
+        <a:font script="Tibt" typeface="Microsoft Himalaya"/>
+        <a:font script="Thaa" typeface="MV Boli"/>
+        <a:font script="Deva" typeface="Mangal"/>
+        <a:font script="Telu" typeface="Gautami"/>
+        <a:font script="Taml" typeface="Latha"/>
+        <a:font script="Syrc" typeface="Estrangelo Edessa"/>
+        <a:font script="Orya" typeface="Kalinga"/>
+        <a:font script="Mlym" typeface="Kartika"/>
+        <a:font script="Laoo" typeface="DokChampa"/>
+        <a:font script="Sinh" typeface="Iskoola Pota"/>
+        <a:font script="Mong" typeface="Mongolian Baiti"/>
+        <a:font script="Viet" typeface="Times New Roman"/>
+        <a:font script="Uigh" typeface="Microsoft Uighur"/>
+        <a:font script="Geor" typeface="Sylfaen"/>
+        <a:font script="Armn" typeface="Arial"/>
+        <a:font script="Bugi" typeface="Leelawadee UI"/>
+        <a:font script="Bopo" typeface="Microsoft JhengHei"/>
+        <a:font script="Java" typeface="Javanese Text"/>
+        <a:font script="Lisu" typeface="Segoe UI"/>
+        <a:font script="Mymr" typeface="Myanmar Text"/>
+        <a:font script="Nkoo" typeface="Ebrima"/>
+        <a:font script="Olck" typeface="Nirmala UI"/>
+        <a:font script="Osma" typeface="Ebrima"/>
+        <a:font script="Phag" typeface="Phagspa"/>
+        <a:font script="Syrn" typeface="Estrangelo Edessa"/>
+        <a:font script="Syrj" typeface="Estrangelo Edessa"/>
+        <a:font script="Syre" typeface="Estrangelo Edessa"/>
+        <a:font script="Sora" typeface="Nirmala UI"/>
+        <a:font script="Tale" typeface="Microsoft Tai Le"/>
+        <a:font script="Talu" typeface="Microsoft New Tai Lue"/>
+        <a:font script="Tfng" typeface="Ebrima"/>
+      </a:majorFont>
+      <a:minorFont>
+        <a:latin typeface="Aptos" panose="02110004020202020204"/>
+        <a:ea typeface=""/>
+        <a:cs typeface=""/>
+        <a:font script="Jpan" typeface="游ゴシック"/>
+        <a:font script="Hang" typeface="맑은 고딕"/>
+        <a:font script="Hans" typeface="等线"/>
+        <a:font script="Hant" typeface="新細明體"/>
+        <a:font script="Arab" typeface="Arial"/>
+        <a:font script="Hebr" typeface="Arial"/>
+        <a:font script="Thai" typeface="Cordia New"/>
+        <a:font script="Ethi" typeface="Nyala"/>
+        <a:font script="Beng" typeface="Vrinda"/>
+        <a:font script="Gujr" typeface="Shruti"/>
+        <a:font script="Khmr" typeface="DaunPenh"/>
+        <a:font script="Knda" typeface="Tunga"/>
+        <a:font script="Guru" typeface="Raavi"/>
+        <a:font script="Cans" typeface="Euphemia"/>
+        <a:font script="Cher" typeface="Plantagenet Cherokee"/>
+        <a:font script="Yiii" typeface="Microsoft Yi Baiti"/>
+        <a:font script="Tibt" typeface="Microsoft Himalaya"/>
+        <a:font script="Thaa" typeface="MV Boli"/>
+        <a:font script="Deva" typeface="Mangal"/>
+        <a:font script="Telu" typeface="Gautami"/>
+        <a:font script="Taml" typeface="Latha"/>
+        <a:font script="Syrc" typeface="Estrangelo Edessa"/>
+        <a:font script="Orya" typeface="Kalinga"/>
+        <a:font script="Mlym" typeface="Kartika"/>
+        <a:font script="Laoo" typeface="DokChampa"/>
+        <a:font script="Sinh" typeface="Iskoola Pota"/>
+        <a:font script="Mong" typeface="Mongolian Baiti"/>
+        <a:font script="Viet" typeface="Arial"/>
+        <a:font script="Uigh" typeface="Microsoft Uighur"/>
+        <a:font script="Geor" typeface="Sylfaen"/>
+        <a:font script="Armn" typeface="Arial"/>
+        <a:font script="Bugi" typeface="Leelawadee UI"/>
+        <a:font script="Bopo" typeface="Microsoft JhengHei"/>
+        <a:font script="Java" typeface="Javanese Text"/>
+        <a:font script="Lisu" typeface="Segoe UI"/>
+        <a:font script="Mymr" typeface="Myanmar Text"/>
+        <a:font script="Nkoo" typeface="Ebrima"/>
+        <a:font script="Olck" typeface="Nirmala UI"/>
+        <a:font script="Osma" typeface="Ebrima"/>
+        <a:font script="Phag" typeface="Phagspa"/>
+        <a:font script="Syrn" typeface="Estrangelo Edessa"/>
+        <a:font script="Syrj" typeface="Estrangelo Edessa"/>
+        <a:font script="Syre" typeface="Estrangelo Edessa"/>
+        <a:font script="Sora" typeface="Nirmala UI"/>
+        <a:font script="Tale" typeface="Microsoft Tai Le"/>
+        <a:font script="Talu" typeface="Microsoft New Tai Lue"/>
+        <a:font script="Tfng" typeface="Ebrima"/>
+      </a:minorFont>
+    </a:fontScheme>
+    <a:fmtScheme name="Office">
+      <a:fillStyleLst>
+        <a:solidFill>
+          <a:schemeClr val="phClr"/>
+        </a:solidFill>
+        <a:gradFill rotWithShape="1">
+          <a:gsLst>
+            <a:gs pos="0">
+              <a:schemeClr val="phClr">
+                <a:lumMod val="110000"/>
+                <a:satMod val="105000"/>
+                <a:tint val="67000"/>
+              </a:schemeClr>
+            </a:gs>
+            <a:gs pos="50000">
+              <a:schemeClr val="phClr">
+                <a:lumMod val="105000"/>
+                <a:satMod val="103000"/>
+                <a:tint val="73000"/>
+              </a:schemeClr>
+            </a:gs>
+            <a:gs pos="100000">
+              <a:schemeClr val="phClr">
+                <a:lumMod val="105000"/>
+                <a:satMod val="109000"/>
+                <a:tint val="81000"/>
+              </a:schemeClr>
+            </a:gs>
+          </a:gsLst>
+          <a:lin ang="5400000" scaled="0"/>
+        </a:gradFill>
+        <a:gradFill rotWithShape="1">
+          <a:gsLst>
+            <a:gs pos="0">
+              <a:schemeClr val="phClr">
+                <a:satMod val="103000"/>
+                <a:lumMod val="102000"/>
+                <a:tint val="94000"/>
+              </a:schemeClr>
+            </a:gs>
+            <a:gs pos="50000">
+              <a:schemeClr val="phClr">
+                <a:satMod val="110000"/>
+                <a:lumMod val="100000"/>
+                <a:shade val="100000"/>
+              </a:schemeClr>
+            </a:gs>
+            <a:gs pos="100000">
+              <a:schemeClr val="phClr">
+                <a:lumMod val="99000"/>
+                <a:satMod val="120000"/>
+                <a:shade val="78000"/>
+              </a:schemeClr>
+            </a:gs>
+          </a:gsLst>
+          <a:lin ang="5400000" scaled="0"/>
+        </a:gradFill>
+      </a:fillStyleLst>
+      <a:lnStyleLst>
+        <a:ln w="12700" cap="flat" cmpd="sng" algn="ctr">
+          <a:solidFill>
+            <a:schemeClr val="phClr"/>
+          </a:solidFill>
+          <a:prstDash val="solid"/>
+          <a:miter lim="800000"/>
+        </a:ln>
+        <a:ln w="19050" cap="flat" cmpd="sng" algn="ctr">
+          <a:solidFill>
+            <a:schemeClr val="phClr"/>
+          </a:solidFill>
+          <a:prstDash val="solid"/>
+          <a:miter lim="800000"/>
+        </a:ln>
+        <a:ln w="25400" cap="flat" cmpd="sng" algn="ctr">
+          <a:solidFill>
+            <a:schemeClr val="phClr"/>
+          </a:solidFill>
+          <a:prstDash val="solid"/>
+          <a:miter lim="800000"/>
+        </a:ln>
+      </a:lnStyleLst>
+      <a:effectStyleLst>
+        <a:effectStyle>
+          <a:effectLst/>
+        </a:effectStyle>
+        <a:effectStyle>
+          <a:effectLst/>
+        </a:effectStyle>
+        <a:effectStyle>
+          <a:effectLst>
+            <a:outerShdw blurRad="57150" dist="19050" dir="5400000" algn="ctr" rotWithShape="0">
+              <a:srgbClr val="000000">
+                <a:alpha val="63000"/>
+              </a:srgbClr>
+            </a:outerShdw>
+          </a:effectLst>
+        </a:effectStyle>
+      </a:effectStyleLst>
+      <a:bgFillStyleLst>
+        <a:solidFill>
+          <a:schemeClr val="phClr"/>
+        </a:solidFill>
+        <a:solidFill>
+          <a:schemeClr val="phClr">
+            <a:tint val="95000"/>
+            <a:satMod val="170000"/>
+          </a:schemeClr>
+        </a:solidFill>
+        <a:gradFill rotWithShape="1">
+          <a:gsLst>
+            <a:gs pos="0">
+              <a:schemeClr val="phClr">
+                <a:tint val="93000"/>
+                <a:satMod val="150000"/>
+                <a:shade val="98000"/>
+                <a:lumMod val="102000"/>
+              </a:schemeClr>
+            </a:gs>
+            <a:gs pos="50000">
+              <a:schemeClr val="phClr">
+                <a:tint val="98000"/>
+                <a:satMod val="130000"/>
+                <a:shade val="90000"/>
+                <a:lumMod val="103000"/>
+              </a:schemeClr>
+            </a:gs>
+            <a:gs pos="100000">
+              <a:schemeClr val="phClr">
+                <a:shade val="63000"/>
+                <a:satMod val="120000"/>
+              </a:schemeClr>
+            </a:gs>
+          </a:gsLst>
+          <a:lin ang="5400000" scaled="0"/>
+        </a:gradFill>
+      </a:bgFillStyleLst>
+    </a:fmtScheme>
+  </a:themeElements>
+  <a:objectDefaults>
+    <a:lnDef>
+      <a:spPr/>
+      <a:bodyPr/>
+      <a:lstStyle/>
+      <a:style>
+        <a:lnRef idx="2">
+          <a:schemeClr val="accent1"/>
+        </a:lnRef>
+        <a:fillRef idx="0">
+          <a:schemeClr val="accent1"/>
+        </a:fillRef>
+        <a:effectRef idx="1">
+          <a:schemeClr val="accent1"/>
+        </a:effectRef>
+        <a:fontRef idx="minor">
+          <a:schemeClr val="tx1"/>
+        </a:fontRef>
+      </a:style>
+    </a:lnDef>
+  </a:objectDefaults>
+  <a:extraClrSchemeLst/>
+  <a:extLst>
+    <a:ext uri="{05A4C25C-085E-4340-85A3-A5531E510DB2}">
+      <thm15:themeFamily xmlns:thm15="http://schemas.microsoft.com/office/thememl/2012/main" name="Office Theme" id="{2E142A2C-CD16-42D6-873A-C26D2A0506FA}" vid="{1BDDFF52-6CD6-40A5-AB3C-68EB2F1E4D0A}"/>
+    </a:ext>
+  </a:extLst>
+</a:theme>
 </file>